--- a/slides/release/06__inter-2-consumer-internals.pptx
+++ b/slides/release/06__inter-2-consumer-internals.pptx
@@ -5,27 +5,27 @@
     <p:sldMasterId id="2147483651" r:id="rId1"/>
   </p:sldMasterIdLst>
   <p:notesMasterIdLst>
-    <p:notesMasterId r:id="rId2"/>
+    <p:notesMasterId r:id="rId17"/>
   </p:notesMasterIdLst>
   <p:handoutMasterIdLst>
-    <p:handoutMasterId r:id="rId3"/>
+    <p:handoutMasterId r:id="rId18"/>
   </p:handoutMasterIdLst>
   <p:sldIdLst>
-    <p:sldId id="256" r:id="rId9"/>
-    <p:sldId id="257" r:id="rId10"/>
-    <p:sldId id="258" r:id="rId11"/>
-    <p:sldId id="259" r:id="rId12"/>
-    <p:sldId id="260" r:id="rId13"/>
-    <p:sldId id="261" r:id="rId14"/>
-    <p:sldId id="262" r:id="rId15"/>
-    <p:sldId id="263" r:id="rId16"/>
-    <p:sldId id="264" r:id="rId17"/>
-    <p:sldId id="265" r:id="rId18"/>
-    <p:sldId id="266" r:id="rId19"/>
-    <p:sldId id="267" r:id="rId20"/>
-    <p:sldId id="268" r:id="rId21"/>
-    <p:sldId id="269" r:id="rId22"/>
-    <p:sldId id="270" r:id="rId23"/>
+    <p:sldId id="256" r:id="rId2"/>
+    <p:sldId id="257" r:id="rId3"/>
+    <p:sldId id="258" r:id="rId4"/>
+    <p:sldId id="259" r:id="rId5"/>
+    <p:sldId id="260" r:id="rId6"/>
+    <p:sldId id="261" r:id="rId7"/>
+    <p:sldId id="262" r:id="rId8"/>
+    <p:sldId id="263" r:id="rId9"/>
+    <p:sldId id="264" r:id="rId10"/>
+    <p:sldId id="265" r:id="rId11"/>
+    <p:sldId id="266" r:id="rId12"/>
+    <p:sldId id="267" r:id="rId13"/>
+    <p:sldId id="268" r:id="rId14"/>
+    <p:sldId id="269" r:id="rId15"/>
+    <p:sldId id="270" r:id="rId16"/>
   </p:sldIdLst>
   <p:sldSz cx="9372600" cy="8297863"/>
   <p:notesSz cx="7315200" cy="9601200"/>
@@ -193,9 +193,7 @@
   <p:cmAuthor id="2" name="Mark Kerzner" initials="MK" lastIdx="6" clrIdx="1"/>
   <p:cmAuthor id="3" name="Mary Beth Conlee" initials="MBC" lastIdx="7" clrIdx="2"/>
   <p:cmAuthor id="4" name="Michelle" initials="M" lastIdx="5" clrIdx="3"/>
-  <p:cmAuthor id="5" name="Tricia Murphy" initials="TM" lastIdx="4" clrIdx="4">
-    <p:extLst/>
-  </p:cmAuthor>
+  <p:cmAuthor id="5" name="Tricia Murphy" initials="TM" lastIdx="4" clrIdx="4"/>
 </p:cmAuthorLst>
 </file>
 
@@ -765,7 +763,7 @@
 </file>
 
 <file path=ppt/notesSlides/notesSlide1.xml><?xml version="1.0" encoding="utf-8"?>
-<p:notes xmlns:a="http://schemas.openxmlformats.org/drawingml/2006/main" xmlns:p="http://schemas.openxmlformats.org/presentationml/2006/main" xmlns:r="http://schemas.openxmlformats.org/officeDocument/2006/relationships">
+<p:notes xmlns:a="http://schemas.openxmlformats.org/drawingml/2006/main" xmlns:r="http://schemas.openxmlformats.org/officeDocument/2006/relationships" xmlns:p="http://schemas.openxmlformats.org/presentationml/2006/main">
   <p:cSld>
     <p:spTree>
       <p:nvGrpSpPr>
@@ -785,34 +783,34 @@
         <p:nvSpPr>
           <p:cNvPr id="2" name="Slide Image Placeholder 1"/>
           <p:cNvSpPr>
+            <a:spLocks noGrp="1" noRot="1" noChangeAspect="1"/>
+          </p:cNvSpPr>
+          <p:nvPr>
+            <p:ph type="sldImg" idx="2"/>
+          </p:nvPr>
+        </p:nvSpPr>
+        <p:spPr/>
+      </p:sp>
+      <p:sp>
+        <p:nvSpPr>
+          <p:cNvPr id="3" name="Slide Number Placeholder 2"/>
+          <p:cNvSpPr>
             <a:spLocks noGrp="1"/>
           </p:cNvSpPr>
           <p:nvPr>
-            <p:ph type="sldImg" idx="2"/>
+            <p:ph type="sldNum" sz="quarter" idx="5"/>
           </p:nvPr>
         </p:nvSpPr>
         <p:spPr/>
       </p:sp>
       <p:sp>
         <p:nvSpPr>
-          <p:cNvPr id="3" name="Slide Number Placeholder 2"/>
+          <p:cNvPr id="4" name="Notes Placeholder 3"/>
           <p:cNvSpPr>
             <a:spLocks noGrp="1"/>
           </p:cNvSpPr>
           <p:nvPr>
-            <p:ph type="sldNum" idx="5" sz="quarter"/>
-          </p:nvPr>
-        </p:nvSpPr>
-        <p:spPr/>
-      </p:sp>
-      <p:sp>
-        <p:nvSpPr>
-          <p:cNvPr id="4" name="Notes Placeholder 3"/>
-          <p:cNvSpPr>
-            <a:spLocks noGrp="1"/>
-          </p:cNvSpPr>
-          <p:nvPr>
-            <p:ph type="body" idx="3" sz="quarter"/>
+            <p:ph type="body" sz="quarter" idx="3"/>
           </p:nvPr>
         </p:nvSpPr>
         <p:spPr/>
@@ -835,7 +833,7 @@
 </file>
 
 <file path=ppt/notesSlides/notesSlide2.xml><?xml version="1.0" encoding="utf-8"?>
-<p:notes xmlns:a="http://schemas.openxmlformats.org/drawingml/2006/main" xmlns:p="http://schemas.openxmlformats.org/presentationml/2006/main" xmlns:r="http://schemas.openxmlformats.org/officeDocument/2006/relationships">
+<p:notes xmlns:a="http://schemas.openxmlformats.org/drawingml/2006/main" xmlns:r="http://schemas.openxmlformats.org/officeDocument/2006/relationships" xmlns:p="http://schemas.openxmlformats.org/presentationml/2006/main">
   <p:cSld>
     <p:spTree>
       <p:nvGrpSpPr>
@@ -855,34 +853,34 @@
         <p:nvSpPr>
           <p:cNvPr id="2" name="Slide Image Placeholder 1"/>
           <p:cNvSpPr>
+            <a:spLocks noGrp="1" noRot="1" noChangeAspect="1"/>
+          </p:cNvSpPr>
+          <p:nvPr>
+            <p:ph type="sldImg" idx="2"/>
+          </p:nvPr>
+        </p:nvSpPr>
+        <p:spPr/>
+      </p:sp>
+      <p:sp>
+        <p:nvSpPr>
+          <p:cNvPr id="3" name="Slide Number Placeholder 2"/>
+          <p:cNvSpPr>
             <a:spLocks noGrp="1"/>
           </p:cNvSpPr>
           <p:nvPr>
-            <p:ph type="sldImg" idx="2"/>
+            <p:ph type="sldNum" sz="quarter" idx="5"/>
           </p:nvPr>
         </p:nvSpPr>
         <p:spPr/>
       </p:sp>
       <p:sp>
         <p:nvSpPr>
-          <p:cNvPr id="3" name="Slide Number Placeholder 2"/>
+          <p:cNvPr id="4" name="Notes Placeholder 3"/>
           <p:cNvSpPr>
             <a:spLocks noGrp="1"/>
           </p:cNvSpPr>
           <p:nvPr>
-            <p:ph type="sldNum" idx="5" sz="quarter"/>
-          </p:nvPr>
-        </p:nvSpPr>
-        <p:spPr/>
-      </p:sp>
-      <p:sp>
-        <p:nvSpPr>
-          <p:cNvPr id="4" name="Notes Placeholder 3"/>
-          <p:cNvSpPr>
-            <a:spLocks noGrp="1"/>
-          </p:cNvSpPr>
-          <p:nvPr>
-            <p:ph type="body" idx="3" sz="quarter"/>
+            <p:ph type="body" sz="quarter" idx="3"/>
           </p:nvPr>
         </p:nvSpPr>
         <p:spPr/>
@@ -905,7 +903,7 @@
 </file>
 
 <file path=ppt/notesSlides/notesSlide3.xml><?xml version="1.0" encoding="utf-8"?>
-<p:notes xmlns:a="http://schemas.openxmlformats.org/drawingml/2006/main" xmlns:p="http://schemas.openxmlformats.org/presentationml/2006/main" xmlns:r="http://schemas.openxmlformats.org/officeDocument/2006/relationships">
+<p:notes xmlns:a="http://schemas.openxmlformats.org/drawingml/2006/main" xmlns:r="http://schemas.openxmlformats.org/officeDocument/2006/relationships" xmlns:p="http://schemas.openxmlformats.org/presentationml/2006/main">
   <p:cSld>
     <p:spTree>
       <p:nvGrpSpPr>
@@ -925,34 +923,34 @@
         <p:nvSpPr>
           <p:cNvPr id="2" name="Slide Image Placeholder 1"/>
           <p:cNvSpPr>
+            <a:spLocks noGrp="1" noRot="1" noChangeAspect="1"/>
+          </p:cNvSpPr>
+          <p:nvPr>
+            <p:ph type="sldImg" idx="2"/>
+          </p:nvPr>
+        </p:nvSpPr>
+        <p:spPr/>
+      </p:sp>
+      <p:sp>
+        <p:nvSpPr>
+          <p:cNvPr id="3" name="Slide Number Placeholder 2"/>
+          <p:cNvSpPr>
             <a:spLocks noGrp="1"/>
           </p:cNvSpPr>
           <p:nvPr>
-            <p:ph type="sldImg" idx="2"/>
+            <p:ph type="sldNum" sz="quarter" idx="5"/>
           </p:nvPr>
         </p:nvSpPr>
         <p:spPr/>
       </p:sp>
       <p:sp>
         <p:nvSpPr>
-          <p:cNvPr id="3" name="Slide Number Placeholder 2"/>
+          <p:cNvPr id="4" name="Notes Placeholder 3"/>
           <p:cNvSpPr>
             <a:spLocks noGrp="1"/>
           </p:cNvSpPr>
           <p:nvPr>
-            <p:ph type="sldNum" idx="5" sz="quarter"/>
-          </p:nvPr>
-        </p:nvSpPr>
-        <p:spPr/>
-      </p:sp>
-      <p:sp>
-        <p:nvSpPr>
-          <p:cNvPr id="4" name="Notes Placeholder 3"/>
-          <p:cNvSpPr>
-            <a:spLocks noGrp="1"/>
-          </p:cNvSpPr>
-          <p:nvPr>
-            <p:ph type="body" idx="3" sz="quarter"/>
+            <p:ph type="body" sz="quarter" idx="3"/>
           </p:nvPr>
         </p:nvSpPr>
         <p:spPr/>
@@ -1027,7 +1025,7 @@
 </file>
 
 <file path=ppt/notesSlides/notesSlide4.xml><?xml version="1.0" encoding="utf-8"?>
-<p:notes xmlns:a="http://schemas.openxmlformats.org/drawingml/2006/main" xmlns:p="http://schemas.openxmlformats.org/presentationml/2006/main" xmlns:r="http://schemas.openxmlformats.org/officeDocument/2006/relationships">
+<p:notes xmlns:a="http://schemas.openxmlformats.org/drawingml/2006/main" xmlns:r="http://schemas.openxmlformats.org/officeDocument/2006/relationships" xmlns:p="http://schemas.openxmlformats.org/presentationml/2006/main">
   <p:cSld>
     <p:spTree>
       <p:nvGrpSpPr>
@@ -1047,34 +1045,34 @@
         <p:nvSpPr>
           <p:cNvPr id="2" name="Slide Image Placeholder 1"/>
           <p:cNvSpPr>
+            <a:spLocks noGrp="1" noRot="1" noChangeAspect="1"/>
+          </p:cNvSpPr>
+          <p:nvPr>
+            <p:ph type="sldImg" idx="2"/>
+          </p:nvPr>
+        </p:nvSpPr>
+        <p:spPr/>
+      </p:sp>
+      <p:sp>
+        <p:nvSpPr>
+          <p:cNvPr id="3" name="Slide Number Placeholder 2"/>
+          <p:cNvSpPr>
             <a:spLocks noGrp="1"/>
           </p:cNvSpPr>
           <p:nvPr>
-            <p:ph type="sldImg" idx="2"/>
+            <p:ph type="sldNum" sz="quarter" idx="5"/>
           </p:nvPr>
         </p:nvSpPr>
         <p:spPr/>
       </p:sp>
       <p:sp>
         <p:nvSpPr>
-          <p:cNvPr id="3" name="Slide Number Placeholder 2"/>
+          <p:cNvPr id="4" name="Notes Placeholder 3"/>
           <p:cNvSpPr>
             <a:spLocks noGrp="1"/>
           </p:cNvSpPr>
           <p:nvPr>
-            <p:ph type="sldNum" idx="5" sz="quarter"/>
-          </p:nvPr>
-        </p:nvSpPr>
-        <p:spPr/>
-      </p:sp>
-      <p:sp>
-        <p:nvSpPr>
-          <p:cNvPr id="4" name="Notes Placeholder 3"/>
-          <p:cNvSpPr>
-            <a:spLocks noGrp="1"/>
-          </p:cNvSpPr>
-          <p:nvPr>
-            <p:ph type="body" idx="3" sz="quarter"/>
+            <p:ph type="body" sz="quarter" idx="3"/>
           </p:nvPr>
         </p:nvSpPr>
         <p:spPr/>
@@ -1097,7 +1095,7 @@
 </file>
 
 <file path=ppt/notesSlides/notesSlide5.xml><?xml version="1.0" encoding="utf-8"?>
-<p:notes xmlns:a="http://schemas.openxmlformats.org/drawingml/2006/main" xmlns:p="http://schemas.openxmlformats.org/presentationml/2006/main" xmlns:r="http://schemas.openxmlformats.org/officeDocument/2006/relationships">
+<p:notes xmlns:a="http://schemas.openxmlformats.org/drawingml/2006/main" xmlns:r="http://schemas.openxmlformats.org/officeDocument/2006/relationships" xmlns:p="http://schemas.openxmlformats.org/presentationml/2006/main">
   <p:cSld>
     <p:spTree>
       <p:nvGrpSpPr>
@@ -1117,34 +1115,34 @@
         <p:nvSpPr>
           <p:cNvPr id="2" name="Slide Image Placeholder 1"/>
           <p:cNvSpPr>
+            <a:spLocks noGrp="1" noRot="1" noChangeAspect="1"/>
+          </p:cNvSpPr>
+          <p:nvPr>
+            <p:ph type="sldImg" idx="2"/>
+          </p:nvPr>
+        </p:nvSpPr>
+        <p:spPr/>
+      </p:sp>
+      <p:sp>
+        <p:nvSpPr>
+          <p:cNvPr id="3" name="Slide Number Placeholder 2"/>
+          <p:cNvSpPr>
             <a:spLocks noGrp="1"/>
           </p:cNvSpPr>
           <p:nvPr>
-            <p:ph type="sldImg" idx="2"/>
+            <p:ph type="sldNum" sz="quarter" idx="5"/>
           </p:nvPr>
         </p:nvSpPr>
         <p:spPr/>
       </p:sp>
       <p:sp>
         <p:nvSpPr>
-          <p:cNvPr id="3" name="Slide Number Placeholder 2"/>
+          <p:cNvPr id="4" name="Notes Placeholder 3"/>
           <p:cNvSpPr>
             <a:spLocks noGrp="1"/>
           </p:cNvSpPr>
           <p:nvPr>
-            <p:ph type="sldNum" idx="5" sz="quarter"/>
-          </p:nvPr>
-        </p:nvSpPr>
-        <p:spPr/>
-      </p:sp>
-      <p:sp>
-        <p:nvSpPr>
-          <p:cNvPr id="4" name="Notes Placeholder 3"/>
-          <p:cNvSpPr>
-            <a:spLocks noGrp="1"/>
-          </p:cNvSpPr>
-          <p:nvPr>
-            <p:ph type="body" idx="3" sz="quarter"/>
+            <p:ph type="body" sz="quarter" idx="3"/>
           </p:nvPr>
         </p:nvSpPr>
         <p:spPr/>
@@ -1167,7 +1165,7 @@
 </file>
 
 <file path=ppt/notesSlides/notesSlide6.xml><?xml version="1.0" encoding="utf-8"?>
-<p:notes xmlns:a="http://schemas.openxmlformats.org/drawingml/2006/main" xmlns:p="http://schemas.openxmlformats.org/presentationml/2006/main" xmlns:r="http://schemas.openxmlformats.org/officeDocument/2006/relationships">
+<p:notes xmlns:a="http://schemas.openxmlformats.org/drawingml/2006/main" xmlns:r="http://schemas.openxmlformats.org/officeDocument/2006/relationships" xmlns:p="http://schemas.openxmlformats.org/presentationml/2006/main">
   <p:cSld>
     <p:spTree>
       <p:nvGrpSpPr>
@@ -1187,34 +1185,34 @@
         <p:nvSpPr>
           <p:cNvPr id="2" name="Slide Image Placeholder 1"/>
           <p:cNvSpPr>
+            <a:spLocks noGrp="1" noRot="1" noChangeAspect="1"/>
+          </p:cNvSpPr>
+          <p:nvPr>
+            <p:ph type="sldImg" idx="2"/>
+          </p:nvPr>
+        </p:nvSpPr>
+        <p:spPr/>
+      </p:sp>
+      <p:sp>
+        <p:nvSpPr>
+          <p:cNvPr id="3" name="Slide Number Placeholder 2"/>
+          <p:cNvSpPr>
             <a:spLocks noGrp="1"/>
           </p:cNvSpPr>
           <p:nvPr>
-            <p:ph type="sldImg" idx="2"/>
+            <p:ph type="sldNum" sz="quarter" idx="5"/>
           </p:nvPr>
         </p:nvSpPr>
         <p:spPr/>
       </p:sp>
       <p:sp>
         <p:nvSpPr>
-          <p:cNvPr id="3" name="Slide Number Placeholder 2"/>
+          <p:cNvPr id="4" name="Notes Placeholder 3"/>
           <p:cNvSpPr>
             <a:spLocks noGrp="1"/>
           </p:cNvSpPr>
           <p:nvPr>
-            <p:ph type="sldNum" idx="5" sz="quarter"/>
-          </p:nvPr>
-        </p:nvSpPr>
-        <p:spPr/>
-      </p:sp>
-      <p:sp>
-        <p:nvSpPr>
-          <p:cNvPr id="4" name="Notes Placeholder 3"/>
-          <p:cNvSpPr>
-            <a:spLocks noGrp="1"/>
-          </p:cNvSpPr>
-          <p:nvPr>
-            <p:ph type="body" idx="3" sz="quarter"/>
+            <p:ph type="body" sz="quarter" idx="3"/>
           </p:nvPr>
         </p:nvSpPr>
         <p:spPr/>
@@ -1262,7 +1260,7 @@
 </file>
 
 <file path=ppt/notesSlides/notesSlide7.xml><?xml version="1.0" encoding="utf-8"?>
-<p:notes xmlns:a="http://schemas.openxmlformats.org/drawingml/2006/main" xmlns:p="http://schemas.openxmlformats.org/presentationml/2006/main" xmlns:r="http://schemas.openxmlformats.org/officeDocument/2006/relationships">
+<p:notes xmlns:a="http://schemas.openxmlformats.org/drawingml/2006/main" xmlns:r="http://schemas.openxmlformats.org/officeDocument/2006/relationships" xmlns:p="http://schemas.openxmlformats.org/presentationml/2006/main">
   <p:cSld>
     <p:spTree>
       <p:nvGrpSpPr>
@@ -1282,34 +1280,34 @@
         <p:nvSpPr>
           <p:cNvPr id="2" name="Slide Image Placeholder 1"/>
           <p:cNvSpPr>
+            <a:spLocks noGrp="1" noRot="1" noChangeAspect="1"/>
+          </p:cNvSpPr>
+          <p:nvPr>
+            <p:ph type="sldImg" idx="2"/>
+          </p:nvPr>
+        </p:nvSpPr>
+        <p:spPr/>
+      </p:sp>
+      <p:sp>
+        <p:nvSpPr>
+          <p:cNvPr id="3" name="Slide Number Placeholder 2"/>
+          <p:cNvSpPr>
             <a:spLocks noGrp="1"/>
           </p:cNvSpPr>
           <p:nvPr>
-            <p:ph type="sldImg" idx="2"/>
+            <p:ph type="sldNum" sz="quarter" idx="5"/>
           </p:nvPr>
         </p:nvSpPr>
         <p:spPr/>
       </p:sp>
       <p:sp>
         <p:nvSpPr>
-          <p:cNvPr id="3" name="Slide Number Placeholder 2"/>
+          <p:cNvPr id="4" name="Notes Placeholder 3"/>
           <p:cNvSpPr>
             <a:spLocks noGrp="1"/>
           </p:cNvSpPr>
           <p:nvPr>
-            <p:ph type="sldNum" idx="5" sz="quarter"/>
-          </p:nvPr>
-        </p:nvSpPr>
-        <p:spPr/>
-      </p:sp>
-      <p:sp>
-        <p:nvSpPr>
-          <p:cNvPr id="4" name="Notes Placeholder 3"/>
-          <p:cNvSpPr>
-            <a:spLocks noGrp="1"/>
-          </p:cNvSpPr>
-          <p:nvPr>
-            <p:ph type="body" idx="3" sz="quarter"/>
+            <p:ph type="body" sz="quarter" idx="3"/>
           </p:nvPr>
         </p:nvSpPr>
         <p:spPr/>
@@ -2845,7 +2843,7 @@
 </file>
 
 <file path=ppt/slides/slide1.xml><?xml version="1.0" encoding="utf-8"?>
-<p:sld xmlns:a="http://schemas.openxmlformats.org/drawingml/2006/main" xmlns:p="http://schemas.openxmlformats.org/presentationml/2006/main" xmlns:r="http://schemas.openxmlformats.org/officeDocument/2006/relationships">
+<p:sld xmlns:a="http://schemas.openxmlformats.org/drawingml/2006/main" xmlns:r="http://schemas.openxmlformats.org/officeDocument/2006/relationships" xmlns:p="http://schemas.openxmlformats.org/presentationml/2006/main">
   <p:cSld>
     <p:spTree>
       <p:nvGrpSpPr>
@@ -2853,7 +2851,14 @@
         <p:cNvGrpSpPr/>
         <p:nvPr/>
       </p:nvGrpSpPr>
-      <p:grpSpPr/>
+      <p:grpSpPr>
+        <a:xfrm>
+          <a:off x="0" y="0"/>
+          <a:ext cx="0" cy="0"/>
+          <a:chOff x="0" y="0"/>
+          <a:chExt cx="0" cy="0"/>
+        </a:xfrm>
+      </p:grpSpPr>
       <p:sp>
         <p:nvSpPr>
           <p:cNvPr id="2" name="Subtitle 1"/>
@@ -2861,14 +2866,16 @@
             <a:spLocks noGrp="1"/>
           </p:cNvSpPr>
           <p:nvPr>
-            <p:ph type="subTitle" idx="1" sz="quarter"/>
+            <p:ph type="subTitle" sz="quarter" idx="1"/>
           </p:nvPr>
         </p:nvSpPr>
         <p:spPr/>
         <p:txBody>
           <a:bodyPr/>
           <a:lstStyle/>
-          <a:p/>
+          <a:p>
+            <a:endParaRPr/>
+          </a:p>
         </p:txBody>
       </p:sp>
       <p:sp>
@@ -2894,9 +2901,6 @@
               </a:rPr>
               <a:t>Intermediate 2 — Consumer Internals</a:t>
             </a:r>
-            <a:endParaRPr sz="4200" b="1" i="0">
-              <a:latin typeface="Times New Roman"/>
-            </a:endParaRPr>
           </a:p>
         </p:txBody>
       </p:sp>
@@ -2942,7 +2946,7 @@
 </file>
 
 <file path=ppt/slides/slide10.xml><?xml version="1.0" encoding="utf-8"?>
-<p:sld xmlns:a="http://schemas.openxmlformats.org/drawingml/2006/main" xmlns:p="http://schemas.openxmlformats.org/presentationml/2006/main" xmlns:r="http://schemas.openxmlformats.org/officeDocument/2006/relationships">
+<p:sld xmlns:a="http://schemas.openxmlformats.org/drawingml/2006/main" xmlns:r="http://schemas.openxmlformats.org/officeDocument/2006/relationships" xmlns:p="http://schemas.openxmlformats.org/presentationml/2006/main">
   <p:cSld>
     <p:spTree>
       <p:nvGrpSpPr>
@@ -2950,7 +2954,14 @@
         <p:cNvGrpSpPr/>
         <p:nvPr/>
       </p:nvGrpSpPr>
-      <p:grpSpPr/>
+      <p:grpSpPr>
+        <a:xfrm>
+          <a:off x="0" y="0"/>
+          <a:ext cx="0" cy="0"/>
+          <a:chOff x="0" y="0"/>
+          <a:chExt cx="0" cy="0"/>
+        </a:xfrm>
+      </p:grpSpPr>
       <p:sp>
         <p:nvSpPr>
           <p:cNvPr id="2" name="Title 1"/>
@@ -2998,11 +3009,21 @@
               <a:t> you've processed a batch.</a:t>
             </a:r>
           </a:p>
-          <a:p/>
-          <a:p/>
-          <a:p/>
-          <a:p/>
-          <a:p/>
+          <a:p>
+            <a:endParaRPr/>
+          </a:p>
+          <a:p>
+            <a:endParaRPr/>
+          </a:p>
+          <a:p>
+            <a:endParaRPr/>
+          </a:p>
+          <a:p>
+            <a:endParaRPr/>
+          </a:p>
+          <a:p>
+            <a:endParaRPr/>
+          </a:p>
           <a:p>
             <a:r>
               <a:t> Commit</a:t>
@@ -3058,10 +3079,7 @@
               <a:t> commitAsync()</a:t>
             </a:r>
             <a:r>
-              <a:t> returns immediately</a:t>
-            </a:r>
-            <a:r>
-              <a:t> (faster, best-effort) — a common pattern is async in the loop, sync on shutdown</a:t>
+              <a:t> returns immediately (faster, best-effort) — a common pattern is async in the loop, sync on shutdown</a:t>
             </a:r>
           </a:p>
         </p:txBody>
@@ -3108,7 +3126,7 @@
           <p:nvPr/>
         </p:nvPicPr>
         <p:blipFill>
-          <a:blip r:embed="rId2"/>
+          <a:blip r:embed="rId3"/>
           <a:stretch>
             <a:fillRect/>
           </a:stretch>
@@ -3132,7 +3150,7 @@
 </file>
 
 <file path=ppt/slides/slide11.xml><?xml version="1.0" encoding="utf-8"?>
-<p:sld xmlns:a="http://schemas.openxmlformats.org/drawingml/2006/main" xmlns:p="http://schemas.openxmlformats.org/presentationml/2006/main" xmlns:r="http://schemas.openxmlformats.org/officeDocument/2006/relationships">
+<p:sld xmlns:a="http://schemas.openxmlformats.org/drawingml/2006/main" xmlns:r="http://schemas.openxmlformats.org/officeDocument/2006/relationships" xmlns:p="http://schemas.openxmlformats.org/presentationml/2006/main">
   <p:cSld>
     <p:spTree>
       <p:nvGrpSpPr>
@@ -3140,7 +3158,14 @@
         <p:cNvGrpSpPr/>
         <p:nvPr/>
       </p:nvGrpSpPr>
-      <p:grpSpPr/>
+      <p:grpSpPr>
+        <a:xfrm>
+          <a:off x="0" y="0"/>
+          <a:ext cx="0" cy="0"/>
+          <a:chOff x="0" y="0"/>
+          <a:chExt cx="0" cy="0"/>
+        </a:xfrm>
+      </p:grpSpPr>
       <p:sp>
         <p:nvSpPr>
           <p:cNvPr id="2" name="Title 1"/>
@@ -3188,11 +3213,21 @@
               <a:t> .</a:t>
             </a:r>
           </a:p>
-          <a:p/>
-          <a:p/>
-          <a:p/>
-          <a:p/>
-          <a:p/>
+          <a:p>
+            <a:endParaRPr/>
+          </a:p>
+          <a:p>
+            <a:endParaRPr/>
+          </a:p>
+          <a:p>
+            <a:endParaRPr/>
+          </a:p>
+          <a:p>
+            <a:endParaRPr/>
+          </a:p>
+          <a:p>
+            <a:endParaRPr/>
+          </a:p>
           <a:p>
             <a:r>
               <a:t> Most real consumers want</a:t>
@@ -3281,9 +3316,27 @@
                 <a:tableStyleId>{5C22544A-7EE6-4342-B048-85BDC9FD1C3A}</a:tableStyleId>
               </a:tblPr>
               <a:tblGrid>
-                <a:gridCol w="2971800"/>
-                <a:gridCol w="2971800"/>
-                <a:gridCol w="2971800"/>
+                <a:gridCol w="2971800">
+                  <a:extLst>
+                    <a:ext uri="{9D8B030D-6E8A-4147-A177-3AD203B41FA5}">
+                      <a16:colId xmlns:a16="http://schemas.microsoft.com/office/drawing/2014/main" val="20000"/>
+                    </a:ext>
+                  </a:extLst>
+                </a:gridCol>
+                <a:gridCol w="2971800">
+                  <a:extLst>
+                    <a:ext uri="{9D8B030D-6E8A-4147-A177-3AD203B41FA5}">
+                      <a16:colId xmlns:a16="http://schemas.microsoft.com/office/drawing/2014/main" val="20001"/>
+                    </a:ext>
+                  </a:extLst>
+                </a:gridCol>
+                <a:gridCol w="2971800">
+                  <a:extLst>
+                    <a:ext uri="{9D8B030D-6E8A-4147-A177-3AD203B41FA5}">
+                      <a16:colId xmlns:a16="http://schemas.microsoft.com/office/drawing/2014/main" val="20002"/>
+                    </a:ext>
+                  </a:extLst>
+                </a:gridCol>
               </a:tblGrid>
               <a:tr h="457200">
                 <a:tc>
@@ -3322,6 +3375,11 @@
                   </a:txBody>
                   <a:tcPr/>
                 </a:tc>
+                <a:extLst>
+                  <a:ext uri="{0D108BD9-81ED-4DB2-BD59-A6C34878D82A}">
+                    <a16:rowId xmlns:a16="http://schemas.microsoft.com/office/drawing/2014/main" val="10000"/>
+                  </a:ext>
+                </a:extLst>
               </a:tr>
               <a:tr h="457200">
                 <a:tc>
@@ -3367,6 +3425,11 @@
                   </a:txBody>
                   <a:tcPr/>
                 </a:tc>
+                <a:extLst>
+                  <a:ext uri="{0D108BD9-81ED-4DB2-BD59-A6C34878D82A}">
+                    <a16:rowId xmlns:a16="http://schemas.microsoft.com/office/drawing/2014/main" val="10001"/>
+                  </a:ext>
+                </a:extLst>
               </a:tr>
               <a:tr h="457200">
                 <a:tc>
@@ -3412,6 +3475,11 @@
                   </a:txBody>
                   <a:tcPr/>
                 </a:tc>
+                <a:extLst>
+                  <a:ext uri="{0D108BD9-81ED-4DB2-BD59-A6C34878D82A}">
+                    <a16:rowId xmlns:a16="http://schemas.microsoft.com/office/drawing/2014/main" val="10002"/>
+                  </a:ext>
+                </a:extLst>
               </a:tr>
               <a:tr h="457200">
                 <a:tc>
@@ -3425,9 +3493,6 @@
                       <a:r>
                         <a:rPr b="1"/>
                         <a:t>atomically</a:t>
-                      </a:r>
-                      <a:r>
-                        <a:t/>
                       </a:r>
                     </a:p>
                   </a:txBody>
@@ -3457,6 +3522,11 @@
                   </a:txBody>
                   <a:tcPr/>
                 </a:tc>
+                <a:extLst>
+                  <a:ext uri="{0D108BD9-81ED-4DB2-BD59-A6C34878D82A}">
+                    <a16:rowId xmlns:a16="http://schemas.microsoft.com/office/drawing/2014/main" val="10003"/>
+                  </a:ext>
+                </a:extLst>
               </a:tr>
             </a:tbl>
           </a:graphicData>
@@ -3471,7 +3541,7 @@
 </file>
 
 <file path=ppt/slides/slide12.xml><?xml version="1.0" encoding="utf-8"?>
-<p:sld xmlns:a="http://schemas.openxmlformats.org/drawingml/2006/main" xmlns:p="http://schemas.openxmlformats.org/presentationml/2006/main" xmlns:r="http://schemas.openxmlformats.org/officeDocument/2006/relationships">
+<p:sld xmlns:a="http://schemas.openxmlformats.org/drawingml/2006/main" xmlns:r="http://schemas.openxmlformats.org/officeDocument/2006/relationships" xmlns:p="http://schemas.openxmlformats.org/presentationml/2006/main">
   <p:cSld>
     <p:spTree>
       <p:nvGrpSpPr>
@@ -3479,7 +3549,14 @@
         <p:cNvGrpSpPr/>
         <p:nvPr/>
       </p:nvGrpSpPr>
-      <p:grpSpPr/>
+      <p:grpSpPr>
+        <a:xfrm>
+          <a:off x="0" y="0"/>
+          <a:ext cx="0" cy="0"/>
+          <a:chOff x="0" y="0"/>
+          <a:chExt cx="0" cy="0"/>
+        </a:xfrm>
+      </p:grpSpPr>
       <p:sp>
         <p:nvSpPr>
           <p:cNvPr id="2" name="Title 1"/>
@@ -3524,10 +3601,7 @@
               <a:t> seek</a:t>
             </a:r>
             <a:r>
-              <a:t> a consumer to any</a:t>
-            </a:r>
-            <a:r>
-              <a:t> position and re-read.</a:t>
+              <a:t> a consumer to any position and re-read.</a:t>
             </a:r>
           </a:p>
           <a:p>
@@ -3606,8 +3680,1144 @@
               <a:t> group does with no commits</a:t>
             </a:r>
           </a:p>
-          <a:p/>
-          <a:p/>
+          <a:p>
+            <a:endParaRPr/>
+          </a:p>
+          <a:p>
+            <a:endParaRPr/>
+          </a:p>
+        </p:txBody>
+      </p:sp>
+      <p:sp>
+        <p:nvSpPr>
+          <p:cNvPr id="4" name="TextBox 3"/>
+          <p:cNvSpPr txBox="1"/>
+          <p:nvPr/>
+        </p:nvSpPr>
+        <p:spPr>
+          <a:xfrm>
+            <a:off x="704088" y="8065008"/>
+            <a:ext cx="8915400" cy="228600"/>
+          </a:xfrm>
+          <a:prstGeom prst="rect">
+            <a:avLst/>
+          </a:prstGeom>
+          <a:noFill/>
+        </p:spPr>
+        <p:txBody>
+          <a:bodyPr wrap="none">
+            <a:spAutoFit/>
+          </a:bodyPr>
+          <a:lstStyle/>
+          <a:p>
+            <a:r>
+              <a:rPr sz="800">
+                <a:solidFill>
+                  <a:srgbClr val="000000"/>
+                </a:solidFill>
+              </a:rPr>
+              <a:t>Copyright © 2026 by Elephant Scale, All Rights Reserved</a:t>
+            </a:r>
+          </a:p>
+        </p:txBody>
+      </p:sp>
+      <p:pic>
+        <p:nvPicPr>
+          <p:cNvPr id="5" name="Picture 4" descr="1.png"/>
+          <p:cNvPicPr>
+            <a:picLocks noChangeAspect="1"/>
+          </p:cNvPicPr>
+          <p:nvPr/>
+        </p:nvPicPr>
+        <p:blipFill>
+          <a:blip r:embed="rId3"/>
+          <a:stretch>
+            <a:fillRect/>
+          </a:stretch>
+        </p:blipFill>
+        <p:spPr>
+          <a:xfrm>
+            <a:off x="222250" y="5291931"/>
+            <a:ext cx="8915400" cy="891540"/>
+          </a:xfrm>
+          <a:prstGeom prst="rect">
+            <a:avLst/>
+          </a:prstGeom>
+        </p:spPr>
+      </p:pic>
+    </p:spTree>
+  </p:cSld>
+  <p:clrMapOvr>
+    <a:masterClrMapping/>
+  </p:clrMapOvr>
+</p:sld>
+</file>
+
+<file path=ppt/slides/slide13.xml><?xml version="1.0" encoding="utf-8"?>
+<p:sld xmlns:a="http://schemas.openxmlformats.org/drawingml/2006/main" xmlns:r="http://schemas.openxmlformats.org/officeDocument/2006/relationships" xmlns:p="http://schemas.openxmlformats.org/presentationml/2006/main">
+  <p:cSld>
+    <p:spTree>
+      <p:nvGrpSpPr>
+        <p:cNvPr id="1" name=""/>
+        <p:cNvGrpSpPr/>
+        <p:nvPr/>
+      </p:nvGrpSpPr>
+      <p:grpSpPr>
+        <a:xfrm>
+          <a:off x="0" y="0"/>
+          <a:ext cx="0" cy="0"/>
+          <a:chOff x="0" y="0"/>
+          <a:chExt cx="0" cy="0"/>
+        </a:xfrm>
+      </p:grpSpPr>
+      <p:sp>
+        <p:nvSpPr>
+          <p:cNvPr id="2" name="Title 1"/>
+          <p:cNvSpPr>
+            <a:spLocks noGrp="1"/>
+          </p:cNvSpPr>
+          <p:nvPr>
+            <p:ph type="title"/>
+          </p:nvPr>
+        </p:nvSpPr>
+        <p:spPr/>
+        <p:txBody>
+          <a:bodyPr/>
+          <a:lstStyle/>
+          <a:p>
+            <a:r>
+              <a:t>Handling Rebalances in Your Code</a:t>
+            </a:r>
+          </a:p>
+        </p:txBody>
+      </p:sp>
+      <p:sp>
+        <p:nvSpPr>
+          <p:cNvPr id="3" name="Content Placeholder 2"/>
+          <p:cNvSpPr>
+            <a:spLocks noGrp="1"/>
+          </p:cNvSpPr>
+          <p:nvPr>
+            <p:ph idx="1"/>
+          </p:nvPr>
+        </p:nvSpPr>
+        <p:spPr/>
+        <p:txBody>
+          <a:bodyPr/>
+          <a:lstStyle/>
+          <a:p>
+            <a:r>
+              <a:rPr dirty="0"/>
+              <a:t> When partitions are taken from or given to your consumer, you often need to</a:t>
+            </a:r>
+            <a:r>
+              <a:rPr b="1" dirty="0"/>
+              <a:t> do something</a:t>
+            </a:r>
+            <a:r>
+              <a:rPr dirty="0"/>
+              <a:t> — commit final offsets, flush buffers, load state. That's the</a:t>
+            </a:r>
+            <a:r>
+              <a:rPr b="1" dirty="0"/>
+              <a:t> rebalance listener</a:t>
+            </a:r>
+            <a:r>
+              <a:rPr dirty="0"/>
+              <a:t> .</a:t>
+            </a:r>
+          </a:p>
+          <a:p>
+            <a:endParaRPr dirty="0"/>
+          </a:p>
+          <a:p>
+            <a:endParaRPr dirty="0"/>
+          </a:p>
+          <a:p>
+            <a:endParaRPr dirty="0"/>
+          </a:p>
+          <a:p>
+            <a:endParaRPr lang="en-US" dirty="0"/>
+          </a:p>
+          <a:p>
+            <a:endParaRPr lang="en-US" dirty="0"/>
+          </a:p>
+          <a:p>
+            <a:endParaRPr dirty="0"/>
+          </a:p>
+          <a:p>
+            <a:endParaRPr dirty="0"/>
+          </a:p>
+          <a:p>
+            <a:r>
+              <a:rPr dirty="0">
+                <a:latin typeface="Courier New"/>
+              </a:rPr>
+              <a:t> </a:t>
+            </a:r>
+            <a:r>
+              <a:rPr dirty="0" err="1">
+                <a:latin typeface="Courier New"/>
+              </a:rPr>
+              <a:t>onPartitionsRevoked</a:t>
+            </a:r>
+            <a:r>
+              <a:rPr dirty="0"/>
+              <a:t> fires</a:t>
+            </a:r>
+            <a:r>
+              <a:rPr b="1" dirty="0"/>
+              <a:t> before</a:t>
+            </a:r>
+            <a:r>
+              <a:rPr dirty="0"/>
+              <a:t> you lose partitions → your chance to commit/clean up</a:t>
+            </a:r>
+          </a:p>
+          <a:p>
+            <a:r>
+              <a:rPr dirty="0">
+                <a:latin typeface="Courier New"/>
+              </a:rPr>
+              <a:t> </a:t>
+            </a:r>
+            <a:r>
+              <a:rPr dirty="0" err="1">
+                <a:latin typeface="Courier New"/>
+              </a:rPr>
+              <a:t>onPartitionsAssigned</a:t>
+            </a:r>
+            <a:r>
+              <a:rPr dirty="0"/>
+              <a:t> fires when you gain partitions → seed state, log the assignment</a:t>
+            </a:r>
+          </a:p>
+          <a:p>
+            <a:r>
+              <a:rPr dirty="0"/>
+              <a:t> Committing on revoke is how you avoid re-processing a big chunk after every rebalance</a:t>
+            </a:r>
+          </a:p>
+        </p:txBody>
+      </p:sp>
+      <p:sp>
+        <p:nvSpPr>
+          <p:cNvPr id="4" name="TextBox 3"/>
+          <p:cNvSpPr txBox="1"/>
+          <p:nvPr/>
+        </p:nvSpPr>
+        <p:spPr>
+          <a:xfrm>
+            <a:off x="704088" y="8065008"/>
+            <a:ext cx="8915400" cy="228600"/>
+          </a:xfrm>
+          <a:prstGeom prst="rect">
+            <a:avLst/>
+          </a:prstGeom>
+          <a:noFill/>
+        </p:spPr>
+        <p:txBody>
+          <a:bodyPr wrap="none">
+            <a:spAutoFit/>
+          </a:bodyPr>
+          <a:lstStyle/>
+          <a:p>
+            <a:r>
+              <a:rPr sz="800">
+                <a:solidFill>
+                  <a:srgbClr val="000000"/>
+                </a:solidFill>
+              </a:rPr>
+              <a:t>Copyright © 2026 by Elephant Scale, All Rights Reserved</a:t>
+            </a:r>
+          </a:p>
+        </p:txBody>
+      </p:sp>
+      <p:pic>
+        <p:nvPicPr>
+          <p:cNvPr id="5" name="Picture 4" descr="1.png"/>
+          <p:cNvPicPr>
+            <a:picLocks noChangeAspect="1"/>
+          </p:cNvPicPr>
+          <p:nvPr/>
+        </p:nvPicPr>
+        <p:blipFill>
+          <a:blip r:embed="rId3"/>
+          <a:stretch>
+            <a:fillRect/>
+          </a:stretch>
+        </p:blipFill>
+        <p:spPr>
+          <a:xfrm>
+            <a:off x="234950" y="2472531"/>
+            <a:ext cx="8915400" cy="2511742"/>
+          </a:xfrm>
+          <a:prstGeom prst="rect">
+            <a:avLst/>
+          </a:prstGeom>
+        </p:spPr>
+      </p:pic>
+    </p:spTree>
+  </p:cSld>
+  <p:clrMapOvr>
+    <a:masterClrMapping/>
+  </p:clrMapOvr>
+</p:sld>
+</file>
+
+<file path=ppt/slides/slide14.xml><?xml version="1.0" encoding="utf-8"?>
+<p:sld xmlns:a="http://schemas.openxmlformats.org/drawingml/2006/main" xmlns:r="http://schemas.openxmlformats.org/officeDocument/2006/relationships" xmlns:p="http://schemas.openxmlformats.org/presentationml/2006/main">
+  <p:cSld>
+    <p:spTree>
+      <p:nvGrpSpPr>
+        <p:cNvPr id="1" name=""/>
+        <p:cNvGrpSpPr/>
+        <p:nvPr/>
+      </p:nvGrpSpPr>
+      <p:grpSpPr>
+        <a:xfrm>
+          <a:off x="0" y="0"/>
+          <a:ext cx="0" cy="0"/>
+          <a:chOff x="0" y="0"/>
+          <a:chExt cx="0" cy="0"/>
+        </a:xfrm>
+      </p:grpSpPr>
+      <p:sp>
+        <p:nvSpPr>
+          <p:cNvPr id="2" name="Title 1"/>
+          <p:cNvSpPr>
+            <a:spLocks noGrp="1"/>
+          </p:cNvSpPr>
+          <p:nvPr>
+            <p:ph type="title"/>
+          </p:nvPr>
+        </p:nvSpPr>
+        <p:spPr/>
+        <p:txBody>
+          <a:bodyPr/>
+          <a:lstStyle/>
+          <a:p>
+            <a:r>
+              <a:t>Building a Resilient Consumer</a:t>
+            </a:r>
+          </a:p>
+        </p:txBody>
+      </p:sp>
+      <p:sp>
+        <p:nvSpPr>
+          <p:cNvPr id="3" name="Content Placeholder 2"/>
+          <p:cNvSpPr>
+            <a:spLocks noGrp="1"/>
+          </p:cNvSpPr>
+          <p:nvPr>
+            <p:ph idx="1"/>
+          </p:nvPr>
+        </p:nvSpPr>
+        <p:spPr/>
+        <p:txBody>
+          <a:bodyPr/>
+          <a:lstStyle/>
+          <a:p>
+            <a:r>
+              <a:t> A checklist for consumers that survive real production:</a:t>
+            </a:r>
+          </a:p>
+          <a:p>
+            <a:r>
+              <a:rPr b="1"/>
+              <a:t> Manual commit after processing</a:t>
+            </a:r>
+            <a:r>
+              <a:t> — control your delivery semantics</a:t>
+            </a:r>
+          </a:p>
+          <a:p>
+            <a:r>
+              <a:rPr b="1"/>
+              <a:t> Idempotent processing</a:t>
+            </a:r>
+            <a:r>
+              <a:t> — because at-least-once means occasional duplicates</a:t>
+            </a:r>
+          </a:p>
+          <a:p>
+            <a:r>
+              <a:rPr b="1"/>
+              <a:t> Commit in</a:t>
+            </a:r>
+            <a:r>
+              <a:t> — don't lose progress across rebalances</a:t>
+            </a:r>
+          </a:p>
+          <a:p>
+            <a:r>
+              <a:rPr b="1"/>
+              <a:t> Keep</a:t>
+            </a:r>
+            <a:r>
+              <a:t> — long processing between polls looks like a dead consumer; tune</a:t>
+            </a:r>
+            <a:r>
+              <a:rPr>
+                <a:latin typeface="Courier New"/>
+              </a:rPr>
+              <a:t> max.poll.interval.ms</a:t>
+            </a:r>
+            <a:r>
+              <a:t> or lower</a:t>
+            </a:r>
+            <a:r>
+              <a:rPr>
+                <a:latin typeface="Courier New"/>
+              </a:rPr>
+              <a:t> max.poll.records</a:t>
+            </a:r>
+            <a:r>
+              <a:t> to shrink the batch</a:t>
+            </a:r>
+          </a:p>
+          <a:p>
+            <a:r>
+              <a:rPr b="1"/>
+              <a:t> Expect empty polls and exceptions</a:t>
+            </a:r>
+            <a:r>
+              <a:t> —</a:t>
+            </a:r>
+            <a:r>
+              <a:rPr>
+                <a:latin typeface="Courier New"/>
+              </a:rPr>
+              <a:t> poll()</a:t>
+            </a:r>
+            <a:r>
+              <a:t> often returns zero records; deserialization and auth failures arrive as</a:t>
+            </a:r>
+            <a:r>
+              <a:rPr b="1"/>
+              <a:t> thrown exceptions</a:t>
+            </a:r>
+            <a:r>
+              <a:t> , so wrap the loop</a:t>
+            </a:r>
+          </a:p>
+          <a:p>
+            <a:r>
+              <a:rPr b="1"/>
+              <a:t> Close cleanly</a:t>
+            </a:r>
+            <a:r>
+              <a:t> —</a:t>
+            </a:r>
+            <a:r>
+              <a:rPr>
+                <a:latin typeface="Courier New"/>
+              </a:rPr>
+              <a:t> consumer.close()</a:t>
+            </a:r>
+            <a:r>
+              <a:t> (or try-with-resources) triggers a graceful leave, so the group rebalances immediately instead of waiting out the session timeout</a:t>
+            </a:r>
+          </a:p>
+        </p:txBody>
+      </p:sp>
+      <p:sp>
+        <p:nvSpPr>
+          <p:cNvPr id="4" name="TextBox 3"/>
+          <p:cNvSpPr txBox="1"/>
+          <p:nvPr/>
+        </p:nvSpPr>
+        <p:spPr>
+          <a:xfrm>
+            <a:off x="704088" y="8065008"/>
+            <a:ext cx="8915400" cy="228600"/>
+          </a:xfrm>
+          <a:prstGeom prst="rect">
+            <a:avLst/>
+          </a:prstGeom>
+          <a:noFill/>
+        </p:spPr>
+        <p:txBody>
+          <a:bodyPr wrap="none">
+            <a:spAutoFit/>
+          </a:bodyPr>
+          <a:lstStyle/>
+          <a:p>
+            <a:r>
+              <a:rPr sz="800">
+                <a:solidFill>
+                  <a:srgbClr val="000000"/>
+                </a:solidFill>
+              </a:rPr>
+              <a:t>Copyright © 2026 by Elephant Scale, All Rights Reserved</a:t>
+            </a:r>
+          </a:p>
+        </p:txBody>
+      </p:sp>
+    </p:spTree>
+  </p:cSld>
+  <p:clrMapOvr>
+    <a:masterClrMapping/>
+  </p:clrMapOvr>
+</p:sld>
+</file>
+
+<file path=ppt/slides/slide15.xml><?xml version="1.0" encoding="utf-8"?>
+<p:sld xmlns:a="http://schemas.openxmlformats.org/drawingml/2006/main" xmlns:r="http://schemas.openxmlformats.org/officeDocument/2006/relationships" xmlns:p="http://schemas.openxmlformats.org/presentationml/2006/main">
+  <p:cSld>
+    <p:spTree>
+      <p:nvGrpSpPr>
+        <p:cNvPr id="1" name=""/>
+        <p:cNvGrpSpPr/>
+        <p:nvPr/>
+      </p:nvGrpSpPr>
+      <p:grpSpPr>
+        <a:xfrm>
+          <a:off x="0" y="0"/>
+          <a:ext cx="0" cy="0"/>
+          <a:chOff x="0" y="0"/>
+          <a:chExt cx="0" cy="0"/>
+        </a:xfrm>
+      </p:grpSpPr>
+      <p:sp>
+        <p:nvSpPr>
+          <p:cNvPr id="2" name="Title 1"/>
+          <p:cNvSpPr>
+            <a:spLocks noGrp="1"/>
+          </p:cNvSpPr>
+          <p:nvPr>
+            <p:ph type="title"/>
+          </p:nvPr>
+        </p:nvSpPr>
+        <p:spPr/>
+        <p:txBody>
+          <a:bodyPr/>
+          <a:lstStyle/>
+          <a:p>
+            <a:r>
+              <a:t>Summary</a:t>
+            </a:r>
+          </a:p>
+        </p:txBody>
+      </p:sp>
+      <p:sp>
+        <p:nvSpPr>
+          <p:cNvPr id="3" name="Content Placeholder 2"/>
+          <p:cNvSpPr>
+            <a:spLocks noGrp="1"/>
+          </p:cNvSpPr>
+          <p:nvPr>
+            <p:ph idx="1"/>
+          </p:nvPr>
+        </p:nvSpPr>
+        <p:spPr/>
+        <p:txBody>
+          <a:bodyPr/>
+          <a:lstStyle/>
+          <a:p>
+            <a:r>
+              <a:t> A consumer is a</a:t>
+            </a:r>
+            <a:r>
+              <a:rPr b="1"/>
+              <a:t> poll loop</a:t>
+            </a:r>
+            <a:r>
+              <a:t> ; the group shares partitions and</a:t>
+            </a:r>
+            <a:r>
+              <a:rPr b="1"/>
+              <a:t> rebalances</a:t>
+            </a:r>
+            <a:r>
+              <a:t> on membership change</a:t>
+            </a:r>
+          </a:p>
+          <a:p>
+            <a:r>
+              <a:rPr b="1"/>
+              <a:t> KIP-848</a:t>
+            </a:r>
+            <a:r>
+              <a:t> makes rebalances incremental and broker-coordinated — GA in Kafka 4, opt in with</a:t>
+            </a:r>
+            <a:r>
+              <a:rPr>
+                <a:latin typeface="Courier New"/>
+              </a:rPr>
+              <a:t> group.protocol=consumer</a:t>
+            </a:r>
+            <a:r>
+              <a:t> ; your code is unchanged</a:t>
+            </a:r>
+          </a:p>
+          <a:p>
+            <a:r>
+              <a:rPr b="1"/>
+              <a:t> Offsets</a:t>
+            </a:r>
+            <a:r>
+              <a:t> live in</a:t>
+            </a:r>
+            <a:r>
+              <a:rPr>
+                <a:latin typeface="Courier New"/>
+              </a:rPr>
+              <a:t> __consumer_offsets</a:t>
+            </a:r>
+            <a:r>
+              <a:t> ; a consumer resumes from the last committed offset</a:t>
+            </a:r>
+          </a:p>
+          <a:p>
+            <a:r>
+              <a:rPr b="1"/>
+              <a:t> Auto-commit</a:t>
+            </a:r>
+            <a:r>
+              <a:t> (timer) risks loss;</a:t>
+            </a:r>
+            <a:r>
+              <a:rPr b="1"/>
+              <a:t> manual commit after processing</a:t>
+            </a:r>
+            <a:r>
+              <a:t> gives at-least-once</a:t>
+            </a:r>
+          </a:p>
+          <a:p>
+            <a:r>
+              <a:t> Delivery semantics =</a:t>
+            </a:r>
+            <a:r>
+              <a:rPr b="1"/>
+              <a:t> where you put</a:t>
+            </a:r>
+            <a:r>
+              <a:t> ; exactly-once needs transactions (Module 7)</a:t>
+            </a:r>
+          </a:p>
+          <a:p>
+            <a:r>
+              <a:rPr b="1"/>
+              <a:t> Seek</a:t>
+            </a:r>
+            <a:r>
+              <a:t> enables replay;</a:t>
+            </a:r>
+            <a:r>
+              <a:rPr b="1"/>
+              <a:t> rebalance listeners</a:t>
+            </a:r>
+            <a:r>
+              <a:t> + a resilience checklist make consumers robust</a:t>
+            </a:r>
+          </a:p>
+        </p:txBody>
+      </p:sp>
+      <p:sp>
+        <p:nvSpPr>
+          <p:cNvPr id="4" name="TextBox 3"/>
+          <p:cNvSpPr txBox="1"/>
+          <p:nvPr/>
+        </p:nvSpPr>
+        <p:spPr>
+          <a:xfrm>
+            <a:off x="704088" y="8065008"/>
+            <a:ext cx="8915400" cy="228600"/>
+          </a:xfrm>
+          <a:prstGeom prst="rect">
+            <a:avLst/>
+          </a:prstGeom>
+          <a:noFill/>
+        </p:spPr>
+        <p:txBody>
+          <a:bodyPr wrap="none">
+            <a:spAutoFit/>
+          </a:bodyPr>
+          <a:lstStyle/>
+          <a:p>
+            <a:r>
+              <a:rPr sz="800">
+                <a:solidFill>
+                  <a:srgbClr val="000000"/>
+                </a:solidFill>
+              </a:rPr>
+              <a:t>Copyright © 2026 by Elephant Scale, All Rights Reserved</a:t>
+            </a:r>
+          </a:p>
+        </p:txBody>
+      </p:sp>
+    </p:spTree>
+  </p:cSld>
+  <p:clrMapOvr>
+    <a:masterClrMapping/>
+  </p:clrMapOvr>
+</p:sld>
+</file>
+
+<file path=ppt/slides/slide2.xml><?xml version="1.0" encoding="utf-8"?>
+<p:sld xmlns:a="http://schemas.openxmlformats.org/drawingml/2006/main" xmlns:r="http://schemas.openxmlformats.org/officeDocument/2006/relationships" xmlns:p="http://schemas.openxmlformats.org/presentationml/2006/main">
+  <p:cSld>
+    <p:spTree>
+      <p:nvGrpSpPr>
+        <p:cNvPr id="1" name=""/>
+        <p:cNvGrpSpPr/>
+        <p:nvPr/>
+      </p:nvGrpSpPr>
+      <p:grpSpPr>
+        <a:xfrm>
+          <a:off x="0" y="0"/>
+          <a:ext cx="0" cy="0"/>
+          <a:chOff x="0" y="0"/>
+          <a:chExt cx="0" cy="0"/>
+        </a:xfrm>
+      </p:grpSpPr>
+      <p:sp>
+        <p:nvSpPr>
+          <p:cNvPr id="2" name="Title 1"/>
+          <p:cNvSpPr>
+            <a:spLocks noGrp="1"/>
+          </p:cNvSpPr>
+          <p:nvPr>
+            <p:ph type="title"/>
+          </p:nvPr>
+        </p:nvSpPr>
+        <p:spPr/>
+        <p:txBody>
+          <a:bodyPr/>
+          <a:lstStyle/>
+          <a:p>
+            <a:r>
+              <a:t>Agenda</a:t>
+            </a:r>
+          </a:p>
+        </p:txBody>
+      </p:sp>
+      <p:sp>
+        <p:nvSpPr>
+          <p:cNvPr id="3" name="Content Placeholder 2"/>
+          <p:cNvSpPr>
+            <a:spLocks noGrp="1"/>
+          </p:cNvSpPr>
+          <p:nvPr>
+            <p:ph idx="1"/>
+          </p:nvPr>
+        </p:nvSpPr>
+        <p:spPr/>
+        <p:txBody>
+          <a:bodyPr/>
+          <a:lstStyle/>
+          <a:p>
+            <a:r>
+              <a:t> Consumer groups and rebalancing; the</a:t>
+            </a:r>
+            <a:r>
+              <a:rPr b="1"/>
+              <a:t> KIP-848</a:t>
+            </a:r>
+            <a:r>
+              <a:t> next-gen protocol</a:t>
+            </a:r>
+          </a:p>
+          <a:p>
+            <a:r>
+              <a:t> Offset management: auto vs. manual commit;</a:t>
+            </a:r>
+            <a:r>
+              <a:rPr>
+                <a:latin typeface="Courier New"/>
+              </a:rPr>
+              <a:t> __consumer_offsets</a:t>
+            </a:r>
+          </a:p>
+          <a:p>
+            <a:r>
+              <a:t> Consumer positioning, seeking, and replay</a:t>
+            </a:r>
+          </a:p>
+          <a:p>
+            <a:r>
+              <a:t> Handling rebalances and building resilient consumers</a:t>
+            </a:r>
+          </a:p>
+        </p:txBody>
+      </p:sp>
+      <p:sp>
+        <p:nvSpPr>
+          <p:cNvPr id="4" name="TextBox 3"/>
+          <p:cNvSpPr txBox="1"/>
+          <p:nvPr/>
+        </p:nvSpPr>
+        <p:spPr>
+          <a:xfrm>
+            <a:off x="704088" y="8065008"/>
+            <a:ext cx="8915400" cy="228600"/>
+          </a:xfrm>
+          <a:prstGeom prst="rect">
+            <a:avLst/>
+          </a:prstGeom>
+          <a:noFill/>
+        </p:spPr>
+        <p:txBody>
+          <a:bodyPr wrap="none">
+            <a:spAutoFit/>
+          </a:bodyPr>
+          <a:lstStyle/>
+          <a:p>
+            <a:r>
+              <a:rPr sz="800">
+                <a:solidFill>
+                  <a:srgbClr val="000000"/>
+                </a:solidFill>
+              </a:rPr>
+              <a:t>Copyright © 2026 by Elephant Scale, All Rights Reserved</a:t>
+            </a:r>
+          </a:p>
+        </p:txBody>
+      </p:sp>
+    </p:spTree>
+  </p:cSld>
+  <p:clrMapOvr>
+    <a:masterClrMapping/>
+  </p:clrMapOvr>
+</p:sld>
+</file>
+
+<file path=ppt/slides/slide3.xml><?xml version="1.0" encoding="utf-8"?>
+<p:sld xmlns:a="http://schemas.openxmlformats.org/drawingml/2006/main" xmlns:r="http://schemas.openxmlformats.org/officeDocument/2006/relationships" xmlns:p="http://schemas.openxmlformats.org/presentationml/2006/main">
+  <p:cSld>
+    <p:spTree>
+      <p:nvGrpSpPr>
+        <p:cNvPr id="1" name=""/>
+        <p:cNvGrpSpPr/>
+        <p:nvPr/>
+      </p:nvGrpSpPr>
+      <p:grpSpPr>
+        <a:xfrm>
+          <a:off x="0" y="0"/>
+          <a:ext cx="0" cy="0"/>
+          <a:chOff x="0" y="0"/>
+          <a:chExt cx="0" cy="0"/>
+        </a:xfrm>
+      </p:grpSpPr>
+      <p:sp>
+        <p:nvSpPr>
+          <p:cNvPr id="2" name="Title 1"/>
+          <p:cNvSpPr>
+            <a:spLocks noGrp="1"/>
+          </p:cNvSpPr>
+          <p:nvPr>
+            <p:ph type="title"/>
+          </p:nvPr>
+        </p:nvSpPr>
+        <p:spPr/>
+        <p:txBody>
+          <a:bodyPr/>
+          <a:lstStyle/>
+          <a:p>
+            <a:r>
+              <a:t>The Consumer's Job</a:t>
+            </a:r>
+          </a:p>
+        </p:txBody>
+      </p:sp>
+      <p:sp>
+        <p:nvSpPr>
+          <p:cNvPr id="3" name="Content Placeholder 2"/>
+          <p:cNvSpPr>
+            <a:spLocks noGrp="1"/>
+          </p:cNvSpPr>
+          <p:nvPr>
+            <p:ph idx="1"/>
+          </p:nvPr>
+        </p:nvSpPr>
+        <p:spPr/>
+        <p:txBody>
+          <a:bodyPr/>
+          <a:lstStyle/>
+          <a:p>
+            <a:r>
+              <a:rPr dirty="0"/>
+              <a:t> A consumer is a</a:t>
+            </a:r>
+            <a:r>
+              <a:rPr b="1" dirty="0"/>
+              <a:t> poll loop</a:t>
+            </a:r>
+            <a:r>
+              <a:rPr dirty="0"/>
+              <a:t> . It asks the broker for records, processes them, and records how far it got.</a:t>
+            </a:r>
+          </a:p>
+          <a:p>
+            <a:endParaRPr dirty="0"/>
+          </a:p>
+          <a:p>
+            <a:endParaRPr dirty="0"/>
+          </a:p>
+          <a:p>
+            <a:endParaRPr lang="en-US" dirty="0"/>
+          </a:p>
+          <a:p>
+            <a:endParaRPr lang="en-US" dirty="0"/>
+          </a:p>
+          <a:p>
+            <a:endParaRPr lang="en-US" dirty="0"/>
+          </a:p>
+          <a:p>
+            <a:endParaRPr dirty="0"/>
+          </a:p>
+          <a:p>
+            <a:r>
+              <a:rPr dirty="0"/>
+              <a:t> The consumer</a:t>
+            </a:r>
+            <a:r>
+              <a:rPr b="1" dirty="0"/>
+              <a:t> pulls</a:t>
+            </a:r>
+            <a:r>
+              <a:rPr dirty="0"/>
+              <a:t> — the broker never pushes. You control the pace.</a:t>
+            </a:r>
+          </a:p>
+          <a:p>
+            <a:r>
+              <a:rPr dirty="0"/>
+              <a:t> Three things to get right:</a:t>
+            </a:r>
+            <a:r>
+              <a:rPr b="1" dirty="0"/>
+              <a:t> group membership</a:t>
+            </a:r>
+            <a:r>
+              <a:rPr dirty="0"/>
+              <a:t> ,</a:t>
+            </a:r>
+            <a:r>
+              <a:rPr b="1" dirty="0"/>
+              <a:t> offset commits</a:t>
+            </a:r>
+            <a:r>
+              <a:rPr dirty="0"/>
+              <a:t> , and</a:t>
+            </a:r>
+            <a:r>
+              <a:rPr b="1" dirty="0"/>
+              <a:t> positioning</a:t>
+            </a:r>
+          </a:p>
+          <a:p>
+            <a:r>
+              <a:rPr dirty="0"/>
+              <a:t> Everything in this module hangs off that loop</a:t>
+            </a:r>
+          </a:p>
+        </p:txBody>
+      </p:sp>
+      <p:sp>
+        <p:nvSpPr>
+          <p:cNvPr id="4" name="TextBox 3"/>
+          <p:cNvSpPr txBox="1"/>
+          <p:nvPr/>
+        </p:nvSpPr>
+        <p:spPr>
+          <a:xfrm>
+            <a:off x="704088" y="8065008"/>
+            <a:ext cx="8915400" cy="228600"/>
+          </a:xfrm>
+          <a:prstGeom prst="rect">
+            <a:avLst/>
+          </a:prstGeom>
+          <a:noFill/>
+        </p:spPr>
+        <p:txBody>
+          <a:bodyPr wrap="none">
+            <a:spAutoFit/>
+          </a:bodyPr>
+          <a:lstStyle/>
+          <a:p>
+            <a:r>
+              <a:rPr sz="800">
+                <a:solidFill>
+                  <a:srgbClr val="000000"/>
+                </a:solidFill>
+              </a:rPr>
+              <a:t>Copyright © 2026 by Elephant Scale, All Rights Reserved</a:t>
+            </a:r>
+          </a:p>
+        </p:txBody>
+      </p:sp>
+      <p:pic>
+        <p:nvPicPr>
+          <p:cNvPr id="5" name="Picture 4" descr="1.png"/>
+          <p:cNvPicPr>
+            <a:picLocks noChangeAspect="1"/>
+          </p:cNvPicPr>
+          <p:nvPr/>
+        </p:nvPicPr>
+        <p:blipFill>
+          <a:blip r:embed="rId3"/>
+          <a:stretch>
+            <a:fillRect/>
+          </a:stretch>
+        </p:blipFill>
+        <p:spPr>
+          <a:xfrm>
+            <a:off x="-17708" y="2472531"/>
+            <a:ext cx="9235257" cy="1676400"/>
+          </a:xfrm>
+          <a:prstGeom prst="rect">
+            <a:avLst/>
+          </a:prstGeom>
+        </p:spPr>
+      </p:pic>
+    </p:spTree>
+  </p:cSld>
+  <p:clrMapOvr>
+    <a:masterClrMapping/>
+  </p:clrMapOvr>
+</p:sld>
+</file>
+
+<file path=ppt/slides/slide4.xml><?xml version="1.0" encoding="utf-8"?>
+<p:sld xmlns:a="http://schemas.openxmlformats.org/drawingml/2006/main" xmlns:r="http://schemas.openxmlformats.org/officeDocument/2006/relationships" xmlns:p="http://schemas.openxmlformats.org/presentationml/2006/main">
+  <p:cSld>
+    <p:spTree>
+      <p:nvGrpSpPr>
+        <p:cNvPr id="1" name=""/>
+        <p:cNvGrpSpPr/>
+        <p:nvPr/>
+      </p:nvGrpSpPr>
+      <p:grpSpPr>
+        <a:xfrm>
+          <a:off x="0" y="0"/>
+          <a:ext cx="0" cy="0"/>
+          <a:chOff x="0" y="0"/>
+          <a:chExt cx="0" cy="0"/>
+        </a:xfrm>
+      </p:grpSpPr>
+      <p:sp>
+        <p:nvSpPr>
+          <p:cNvPr id="2" name="Title 1"/>
+          <p:cNvSpPr>
+            <a:spLocks noGrp="1"/>
+          </p:cNvSpPr>
+          <p:nvPr>
+            <p:ph type="title"/>
+          </p:nvPr>
+        </p:nvSpPr>
+        <p:spPr/>
+        <p:txBody>
+          <a:bodyPr/>
+          <a:lstStyle/>
+          <a:p>
+            <a:r>
+              <a:t>Consumer Groups, Recapped</a:t>
+            </a:r>
+          </a:p>
+        </p:txBody>
+      </p:sp>
+      <p:sp>
+        <p:nvSpPr>
+          <p:cNvPr id="3" name="Content Placeholder 2"/>
+          <p:cNvSpPr>
+            <a:spLocks noGrp="1"/>
+          </p:cNvSpPr>
+          <p:nvPr>
+            <p:ph idx="1"/>
+          </p:nvPr>
+        </p:nvSpPr>
+        <p:spPr/>
+        <p:txBody>
+          <a:bodyPr/>
+          <a:lstStyle/>
+          <a:p>
+            <a:r>
+              <a:rPr dirty="0"/>
+              <a:t> From the intro: consumers sharing a</a:t>
+            </a:r>
+            <a:r>
+              <a:rPr dirty="0">
+                <a:latin typeface="Courier New"/>
+              </a:rPr>
+              <a:t> </a:t>
+            </a:r>
+            <a:r>
+              <a:rPr dirty="0" err="1">
+                <a:latin typeface="Courier New"/>
+              </a:rPr>
+              <a:t>group.id</a:t>
+            </a:r>
+            <a:r>
+              <a:rPr dirty="0"/>
+              <a:t> form a</a:t>
+            </a:r>
+            <a:r>
+              <a:rPr b="1" dirty="0"/>
+              <a:t> group</a:t>
+            </a:r>
+            <a:r>
+              <a:rPr dirty="0"/>
+              <a:t> , and Kafka assigns each partition to</a:t>
+            </a:r>
+            <a:r>
+              <a:rPr b="1" dirty="0"/>
+              <a:t> exactly one</a:t>
+            </a:r>
+            <a:r>
+              <a:rPr dirty="0"/>
+              <a:t> consumer in it.</a:t>
+            </a:r>
+          </a:p>
+          <a:p>
+            <a:endParaRPr dirty="0"/>
+          </a:p>
+          <a:p>
+            <a:endParaRPr lang="en-US" dirty="0"/>
+          </a:p>
+          <a:p>
+            <a:endParaRPr lang="en-US" dirty="0"/>
+          </a:p>
+          <a:p>
+            <a:endParaRPr lang="en-US" dirty="0"/>
+          </a:p>
+          <a:p>
+            <a:endParaRPr dirty="0"/>
+          </a:p>
+          <a:p>
+            <a:r>
+              <a:rPr dirty="0"/>
+              <a:t> Scales reads: more consumers → fewer partitions each → more throughput</a:t>
+            </a:r>
+          </a:p>
+          <a:p>
+            <a:r>
+              <a:rPr dirty="0"/>
+              <a:t> Ceiling = partition count (extra consumers sit idle)</a:t>
+            </a:r>
+          </a:p>
+          <a:p>
+            <a:r>
+              <a:rPr dirty="0"/>
+              <a:t> Every</a:t>
+            </a:r>
+            <a:r>
+              <a:rPr b="1" dirty="0"/>
+              <a:t> group</a:t>
+            </a:r>
+            <a:r>
+              <a:rPr dirty="0"/>
+              <a:t> reads the whole topic independently (pub/sub)</a:t>
+            </a:r>
+          </a:p>
+          <a:p>
+            <a:r>
+              <a:rPr dirty="0"/>
+              <a:t> Now the internals: how assignment changes, and how progress is remembered.</a:t>
+            </a:r>
+          </a:p>
         </p:txBody>
       </p:sp>
       <p:sp>
@@ -3659,8 +4869,8 @@
         </p:blipFill>
         <p:spPr>
           <a:xfrm>
-            <a:off x="0" y="3547872"/>
-            <a:ext cx="8915400" cy="891540"/>
+            <a:off x="234950" y="2466720"/>
+            <a:ext cx="8178800" cy="1320800"/>
           </a:xfrm>
           <a:prstGeom prst="rect">
             <a:avLst/>
@@ -3675,8 +4885,8 @@
 </p:sld>
 </file>
 
-<file path=ppt/slides/slide13.xml><?xml version="1.0" encoding="utf-8"?>
-<p:sld xmlns:a="http://schemas.openxmlformats.org/drawingml/2006/main" xmlns:p="http://schemas.openxmlformats.org/presentationml/2006/main" xmlns:r="http://schemas.openxmlformats.org/officeDocument/2006/relationships">
+<file path=ppt/slides/slide5.xml><?xml version="1.0" encoding="utf-8"?>
+<p:sld xmlns:a="http://schemas.openxmlformats.org/drawingml/2006/main" xmlns:r="http://schemas.openxmlformats.org/officeDocument/2006/relationships" xmlns:p="http://schemas.openxmlformats.org/presentationml/2006/main">
   <p:cSld>
     <p:spTree>
       <p:nvGrpSpPr>
@@ -3684,7 +4894,14 @@
         <p:cNvGrpSpPr/>
         <p:nvPr/>
       </p:nvGrpSpPr>
-      <p:grpSpPr/>
+      <p:grpSpPr>
+        <a:xfrm>
+          <a:off x="0" y="0"/>
+          <a:ext cx="0" cy="0"/>
+          <a:chOff x="0" y="0"/>
+          <a:chExt cx="0" cy="0"/>
+        </a:xfrm>
+      </p:grpSpPr>
       <p:sp>
         <p:nvSpPr>
           <p:cNvPr id="2" name="Title 1"/>
@@ -3701,7 +4918,7 @@
           <a:lstStyle/>
           <a:p>
             <a:r>
-              <a:t>Handling Rebalances in Your Code</a:t>
+              <a:t>Rebalancing</a:t>
             </a:r>
           </a:p>
         </p:txBody>
@@ -3722,60 +4939,93 @@
           <a:lstStyle/>
           <a:p>
             <a:r>
-              <a:t> When partitions are taken from or given to your consumer, you often need to</a:t>
-            </a:r>
-            <a:r>
-              <a:rPr b="1"/>
-              <a:t> do something</a:t>
-            </a:r>
-            <a:r>
-              <a:t> — commit final offsets, flush buffers, load state. That's the</a:t>
-            </a:r>
-            <a:r>
-              <a:rPr b="1"/>
-              <a:t> rebalance listener</a:t>
-            </a:r>
-            <a:r>
-              <a:t> .</a:t>
-            </a:r>
-          </a:p>
-          <a:p/>
-          <a:p/>
-          <a:p/>
-          <a:p/>
-          <a:p/>
-          <a:p>
-            <a:r>
-              <a:rPr>
-                <a:latin typeface="Courier New"/>
-              </a:rPr>
-              <a:t> onPartitionsRevoked</a:t>
-            </a:r>
-            <a:r>
-              <a:t> fires</a:t>
-            </a:r>
-            <a:r>
-              <a:rPr b="1"/>
-              <a:t> before</a:t>
-            </a:r>
-            <a:r>
-              <a:t> you lose partitions → your chance to commit/clean up</a:t>
-            </a:r>
-          </a:p>
-          <a:p>
-            <a:r>
-              <a:rPr>
-                <a:latin typeface="Courier New"/>
-              </a:rPr>
-              <a:t> onPartitionsAssigned</a:t>
-            </a:r>
-            <a:r>
-              <a:t> fires when you gain partitions → seed state, log the assignment</a:t>
-            </a:r>
-          </a:p>
-          <a:p>
-            <a:r>
-              <a:t> Committing on revoke is how you avoid re-processing a big chunk after every rebalance</a:t>
+              <a:rPr dirty="0"/>
+              <a:t> When group membership changes, Kafka</a:t>
+            </a:r>
+            <a:r>
+              <a:rPr b="1" dirty="0"/>
+              <a:t> rebalances</a:t>
+            </a:r>
+            <a:r>
+              <a:rPr dirty="0"/>
+              <a:t> — it recomputes which consumer owns which partition.</a:t>
+            </a:r>
+          </a:p>
+          <a:p>
+            <a:r>
+              <a:rPr dirty="0"/>
+              <a:t> Triggered when:</a:t>
+            </a:r>
+          </a:p>
+          <a:p>
+            <a:r>
+              <a:rPr dirty="0"/>
+              <a:t> A consumer</a:t>
+            </a:r>
+            <a:r>
+              <a:rPr b="1" dirty="0"/>
+              <a:t> joins</a:t>
+            </a:r>
+            <a:r>
+              <a:rPr dirty="0"/>
+              <a:t> (you scaled up)</a:t>
+            </a:r>
+          </a:p>
+          <a:p>
+            <a:r>
+              <a:rPr dirty="0"/>
+              <a:t> A consumer</a:t>
+            </a:r>
+            <a:r>
+              <a:rPr b="1" dirty="0"/>
+              <a:t> leaves</a:t>
+            </a:r>
+            <a:r>
+              <a:rPr dirty="0"/>
+              <a:t> or</a:t>
+            </a:r>
+            <a:r>
+              <a:rPr b="1" dirty="0"/>
+              <a:t> crashes</a:t>
+            </a:r>
+            <a:r>
+              <a:rPr dirty="0"/>
+              <a:t> (misses heartbeats)</a:t>
+            </a:r>
+          </a:p>
+          <a:p>
+            <a:r>
+              <a:rPr dirty="0"/>
+              <a:t> Partitions are</a:t>
+            </a:r>
+            <a:r>
+              <a:rPr b="1" dirty="0"/>
+              <a:t> added</a:t>
+            </a:r>
+            <a:r>
+              <a:rPr dirty="0"/>
+              <a:t> to a subscribed topic</a:t>
+            </a:r>
+          </a:p>
+          <a:p>
+            <a:endParaRPr lang="en-US" dirty="0"/>
+          </a:p>
+          <a:p>
+            <a:endParaRPr lang="en-US" dirty="0"/>
+          </a:p>
+          <a:p>
+            <a:endParaRPr lang="en-US" dirty="0"/>
+          </a:p>
+          <a:p>
+            <a:endParaRPr dirty="0"/>
+          </a:p>
+          <a:p>
+            <a:endParaRPr dirty="0"/>
+          </a:p>
+          <a:p>
+            <a:r>
+              <a:rPr dirty="0"/>
+              <a:t> Rebalancing keeps the group working through failures — but it isn't free, as the next slide shows.</a:t>
             </a:r>
           </a:p>
         </p:txBody>
@@ -3829,1042 +5079,8 @@
         </p:blipFill>
         <p:spPr>
           <a:xfrm>
-            <a:off x="0" y="2231136"/>
-            <a:ext cx="8915400" cy="2511742"/>
-          </a:xfrm>
-          <a:prstGeom prst="rect">
-            <a:avLst/>
-          </a:prstGeom>
-        </p:spPr>
-      </p:pic>
-    </p:spTree>
-  </p:cSld>
-  <p:clrMapOvr>
-    <a:masterClrMapping/>
-  </p:clrMapOvr>
-</p:sld>
-</file>
-
-<file path=ppt/slides/slide14.xml><?xml version="1.0" encoding="utf-8"?>
-<p:sld xmlns:a="http://schemas.openxmlformats.org/drawingml/2006/main" xmlns:p="http://schemas.openxmlformats.org/presentationml/2006/main" xmlns:r="http://schemas.openxmlformats.org/officeDocument/2006/relationships">
-  <p:cSld>
-    <p:spTree>
-      <p:nvGrpSpPr>
-        <p:cNvPr id="1" name=""/>
-        <p:cNvGrpSpPr/>
-        <p:nvPr/>
-      </p:nvGrpSpPr>
-      <p:grpSpPr/>
-      <p:sp>
-        <p:nvSpPr>
-          <p:cNvPr id="2" name="Title 1"/>
-          <p:cNvSpPr>
-            <a:spLocks noGrp="1"/>
-          </p:cNvSpPr>
-          <p:nvPr>
-            <p:ph type="title"/>
-          </p:nvPr>
-        </p:nvSpPr>
-        <p:spPr/>
-        <p:txBody>
-          <a:bodyPr/>
-          <a:lstStyle/>
-          <a:p>
-            <a:r>
-              <a:t>Building a Resilient Consumer</a:t>
-            </a:r>
-          </a:p>
-        </p:txBody>
-      </p:sp>
-      <p:sp>
-        <p:nvSpPr>
-          <p:cNvPr id="3" name="Content Placeholder 2"/>
-          <p:cNvSpPr>
-            <a:spLocks noGrp="1"/>
-          </p:cNvSpPr>
-          <p:nvPr>
-            <p:ph idx="1"/>
-          </p:nvPr>
-        </p:nvSpPr>
-        <p:spPr/>
-        <p:txBody>
-          <a:bodyPr/>
-          <a:lstStyle/>
-          <a:p>
-            <a:r>
-              <a:t> A checklist for consumers that survive real production:</a:t>
-            </a:r>
-          </a:p>
-          <a:p>
-            <a:r>
-              <a:rPr b="1"/>
-              <a:t> Manual commit after processing</a:t>
-            </a:r>
-            <a:r>
-              <a:t> — control your delivery semantics</a:t>
-            </a:r>
-          </a:p>
-          <a:p>
-            <a:r>
-              <a:rPr b="1"/>
-              <a:t> Idempotent processing</a:t>
-            </a:r>
-            <a:r>
-              <a:t> — because at-least-once means occasional duplicates</a:t>
-            </a:r>
-          </a:p>
-          <a:p>
-            <a:r>
-              <a:rPr b="1"/>
-              <a:t> Commit in</a:t>
-            </a:r>
-            <a:r>
-              <a:t> — don't lose progress across rebalances</a:t>
-            </a:r>
-          </a:p>
-          <a:p>
-            <a:r>
-              <a:rPr b="1"/>
-              <a:t> Keep</a:t>
-            </a:r>
-            <a:r>
-              <a:t> — long processing between polls looks like a dead consumer;</a:t>
-            </a:r>
-            <a:r>
-              <a:t> tune</a:t>
-            </a:r>
-            <a:r>
-              <a:rPr>
-                <a:latin typeface="Courier New"/>
-              </a:rPr>
-              <a:t> max.poll.interval.ms</a:t>
-            </a:r>
-            <a:r>
-              <a:t> or lower</a:t>
-            </a:r>
-            <a:r>
-              <a:rPr>
-                <a:latin typeface="Courier New"/>
-              </a:rPr>
-              <a:t> max.poll.records</a:t>
-            </a:r>
-            <a:r>
-              <a:t> to shrink the batch</a:t>
-            </a:r>
-          </a:p>
-          <a:p>
-            <a:r>
-              <a:rPr b="1"/>
-              <a:t> Expect empty polls and exceptions</a:t>
-            </a:r>
-            <a:r>
-              <a:t> —</a:t>
-            </a:r>
-            <a:r>
-              <a:rPr>
-                <a:latin typeface="Courier New"/>
-              </a:rPr>
-              <a:t> poll()</a:t>
-            </a:r>
-            <a:r>
-              <a:t> often returns zero records; deserialization</a:t>
-            </a:r>
-            <a:r>
-              <a:t> and auth failures arrive as</a:t>
-            </a:r>
-            <a:r>
-              <a:rPr b="1"/>
-              <a:t> thrown exceptions</a:t>
-            </a:r>
-            <a:r>
-              <a:t> , so wrap the loop</a:t>
-            </a:r>
-          </a:p>
-          <a:p>
-            <a:r>
-              <a:rPr b="1"/>
-              <a:t> Close cleanly</a:t>
-            </a:r>
-            <a:r>
-              <a:t> —</a:t>
-            </a:r>
-            <a:r>
-              <a:rPr>
-                <a:latin typeface="Courier New"/>
-              </a:rPr>
-              <a:t> consumer.close()</a:t>
-            </a:r>
-            <a:r>
-              <a:t> (or try-with-resources) triggers a graceful leave,</a:t>
-            </a:r>
-            <a:r>
-              <a:t> so the group rebalances immediately instead of waiting out the session timeout</a:t>
-            </a:r>
-          </a:p>
-        </p:txBody>
-      </p:sp>
-      <p:sp>
-        <p:nvSpPr>
-          <p:cNvPr id="4" name="TextBox 3"/>
-          <p:cNvSpPr txBox="1"/>
-          <p:nvPr/>
-        </p:nvSpPr>
-        <p:spPr>
-          <a:xfrm>
-            <a:off x="704088" y="8065008"/>
-            <a:ext cx="8915400" cy="228600"/>
-          </a:xfrm>
-          <a:prstGeom prst="rect">
-            <a:avLst/>
-          </a:prstGeom>
-          <a:noFill/>
-        </p:spPr>
-        <p:txBody>
-          <a:bodyPr wrap="none">
-            <a:spAutoFit/>
-          </a:bodyPr>
-          <a:lstStyle/>
-          <a:p>
-            <a:r>
-              <a:rPr sz="800">
-                <a:solidFill>
-                  <a:srgbClr val="000000"/>
-                </a:solidFill>
-              </a:rPr>
-              <a:t>Copyright © 2026 by Elephant Scale, All Rights Reserved</a:t>
-            </a:r>
-          </a:p>
-        </p:txBody>
-      </p:sp>
-    </p:spTree>
-  </p:cSld>
-  <p:clrMapOvr>
-    <a:masterClrMapping/>
-  </p:clrMapOvr>
-</p:sld>
-</file>
-
-<file path=ppt/slides/slide15.xml><?xml version="1.0" encoding="utf-8"?>
-<p:sld xmlns:a="http://schemas.openxmlformats.org/drawingml/2006/main" xmlns:p="http://schemas.openxmlformats.org/presentationml/2006/main" xmlns:r="http://schemas.openxmlformats.org/officeDocument/2006/relationships">
-  <p:cSld>
-    <p:spTree>
-      <p:nvGrpSpPr>
-        <p:cNvPr id="1" name=""/>
-        <p:cNvGrpSpPr/>
-        <p:nvPr/>
-      </p:nvGrpSpPr>
-      <p:grpSpPr/>
-      <p:sp>
-        <p:nvSpPr>
-          <p:cNvPr id="2" name="Title 1"/>
-          <p:cNvSpPr>
-            <a:spLocks noGrp="1"/>
-          </p:cNvSpPr>
-          <p:nvPr>
-            <p:ph type="title"/>
-          </p:nvPr>
-        </p:nvSpPr>
-        <p:spPr/>
-        <p:txBody>
-          <a:bodyPr/>
-          <a:lstStyle/>
-          <a:p>
-            <a:r>
-              <a:t>Summary</a:t>
-            </a:r>
-          </a:p>
-        </p:txBody>
-      </p:sp>
-      <p:sp>
-        <p:nvSpPr>
-          <p:cNvPr id="3" name="Content Placeholder 2"/>
-          <p:cNvSpPr>
-            <a:spLocks noGrp="1"/>
-          </p:cNvSpPr>
-          <p:nvPr>
-            <p:ph idx="1"/>
-          </p:nvPr>
-        </p:nvSpPr>
-        <p:spPr/>
-        <p:txBody>
-          <a:bodyPr/>
-          <a:lstStyle/>
-          <a:p>
-            <a:r>
-              <a:t> A consumer is a</a:t>
-            </a:r>
-            <a:r>
-              <a:rPr b="1"/>
-              <a:t> poll loop</a:t>
-            </a:r>
-            <a:r>
-              <a:t> ; the group shares partitions and</a:t>
-            </a:r>
-            <a:r>
-              <a:rPr b="1"/>
-              <a:t> rebalances</a:t>
-            </a:r>
-            <a:r>
-              <a:t> on membership change</a:t>
-            </a:r>
-          </a:p>
-          <a:p>
-            <a:r>
-              <a:rPr b="1"/>
-              <a:t> KIP-848</a:t>
-            </a:r>
-            <a:r>
-              <a:t> makes rebalances incremental and broker-coordinated — GA in Kafka 4, opt in with</a:t>
-            </a:r>
-            <a:r>
-              <a:rPr>
-                <a:latin typeface="Courier New"/>
-              </a:rPr>
-              <a:t> group.protocol=consumer</a:t>
-            </a:r>
-            <a:r>
-              <a:t> ; your code is unchanged</a:t>
-            </a:r>
-          </a:p>
-          <a:p>
-            <a:r>
-              <a:rPr b="1"/>
-              <a:t> Offsets</a:t>
-            </a:r>
-            <a:r>
-              <a:t> live in</a:t>
-            </a:r>
-            <a:r>
-              <a:rPr>
-                <a:latin typeface="Courier New"/>
-              </a:rPr>
-              <a:t> __consumer_offsets</a:t>
-            </a:r>
-            <a:r>
-              <a:t> ; a consumer resumes from the last committed offset</a:t>
-            </a:r>
-          </a:p>
-          <a:p>
-            <a:r>
-              <a:rPr b="1"/>
-              <a:t> Auto-commit</a:t>
-            </a:r>
-            <a:r>
-              <a:t> (timer) risks loss;</a:t>
-            </a:r>
-            <a:r>
-              <a:rPr b="1"/>
-              <a:t> manual commit after processing</a:t>
-            </a:r>
-            <a:r>
-              <a:t> gives at-least-once</a:t>
-            </a:r>
-          </a:p>
-          <a:p>
-            <a:r>
-              <a:t> Delivery semantics =</a:t>
-            </a:r>
-            <a:r>
-              <a:rPr b="1"/>
-              <a:t> where you put</a:t>
-            </a:r>
-            <a:r>
-              <a:t> ; exactly-once needs transactions (Module 7)</a:t>
-            </a:r>
-          </a:p>
-          <a:p>
-            <a:r>
-              <a:rPr b="1"/>
-              <a:t> Seek</a:t>
-            </a:r>
-            <a:r>
-              <a:t> enables replay;</a:t>
-            </a:r>
-            <a:r>
-              <a:rPr b="1"/>
-              <a:t> rebalance listeners</a:t>
-            </a:r>
-            <a:r>
-              <a:t> + a resilience checklist make consumers robust</a:t>
-            </a:r>
-          </a:p>
-        </p:txBody>
-      </p:sp>
-      <p:sp>
-        <p:nvSpPr>
-          <p:cNvPr id="4" name="TextBox 3"/>
-          <p:cNvSpPr txBox="1"/>
-          <p:nvPr/>
-        </p:nvSpPr>
-        <p:spPr>
-          <a:xfrm>
-            <a:off x="704088" y="8065008"/>
-            <a:ext cx="8915400" cy="228600"/>
-          </a:xfrm>
-          <a:prstGeom prst="rect">
-            <a:avLst/>
-          </a:prstGeom>
-          <a:noFill/>
-        </p:spPr>
-        <p:txBody>
-          <a:bodyPr wrap="none">
-            <a:spAutoFit/>
-          </a:bodyPr>
-          <a:lstStyle/>
-          <a:p>
-            <a:r>
-              <a:rPr sz="800">
-                <a:solidFill>
-                  <a:srgbClr val="000000"/>
-                </a:solidFill>
-              </a:rPr>
-              <a:t>Copyright © 2026 by Elephant Scale, All Rights Reserved</a:t>
-            </a:r>
-          </a:p>
-        </p:txBody>
-      </p:sp>
-    </p:spTree>
-  </p:cSld>
-  <p:clrMapOvr>
-    <a:masterClrMapping/>
-  </p:clrMapOvr>
-</p:sld>
-</file>
-
-<file path=ppt/slides/slide2.xml><?xml version="1.0" encoding="utf-8"?>
-<p:sld xmlns:a="http://schemas.openxmlformats.org/drawingml/2006/main" xmlns:p="http://schemas.openxmlformats.org/presentationml/2006/main" xmlns:r="http://schemas.openxmlformats.org/officeDocument/2006/relationships">
-  <p:cSld>
-    <p:spTree>
-      <p:nvGrpSpPr>
-        <p:cNvPr id="1" name=""/>
-        <p:cNvGrpSpPr/>
-        <p:nvPr/>
-      </p:nvGrpSpPr>
-      <p:grpSpPr/>
-      <p:sp>
-        <p:nvSpPr>
-          <p:cNvPr id="2" name="Title 1"/>
-          <p:cNvSpPr>
-            <a:spLocks noGrp="1"/>
-          </p:cNvSpPr>
-          <p:nvPr>
-            <p:ph type="title"/>
-          </p:nvPr>
-        </p:nvSpPr>
-        <p:spPr/>
-        <p:txBody>
-          <a:bodyPr/>
-          <a:lstStyle/>
-          <a:p>
-            <a:r>
-              <a:t>Agenda</a:t>
-            </a:r>
-          </a:p>
-        </p:txBody>
-      </p:sp>
-      <p:sp>
-        <p:nvSpPr>
-          <p:cNvPr id="3" name="Content Placeholder 2"/>
-          <p:cNvSpPr>
-            <a:spLocks noGrp="1"/>
-          </p:cNvSpPr>
-          <p:nvPr>
-            <p:ph idx="1"/>
-          </p:nvPr>
-        </p:nvSpPr>
-        <p:spPr/>
-        <p:txBody>
-          <a:bodyPr/>
-          <a:lstStyle/>
-          <a:p>
-            <a:r>
-              <a:t> Consumer groups and rebalancing; the</a:t>
-            </a:r>
-            <a:r>
-              <a:rPr b="1"/>
-              <a:t> KIP-848</a:t>
-            </a:r>
-            <a:r>
-              <a:t> next-gen protocol</a:t>
-            </a:r>
-          </a:p>
-          <a:p>
-            <a:r>
-              <a:t> Offset management: auto vs. manual commit;</a:t>
-            </a:r>
-            <a:r>
-              <a:rPr>
-                <a:latin typeface="Courier New"/>
-              </a:rPr>
-              <a:t> __consumer_offsets</a:t>
-            </a:r>
-          </a:p>
-          <a:p>
-            <a:r>
-              <a:t> Consumer positioning, seeking, and replay</a:t>
-            </a:r>
-          </a:p>
-          <a:p>
-            <a:r>
-              <a:t> Handling rebalances and building resilient consumers</a:t>
-            </a:r>
-          </a:p>
-        </p:txBody>
-      </p:sp>
-      <p:sp>
-        <p:nvSpPr>
-          <p:cNvPr id="4" name="TextBox 3"/>
-          <p:cNvSpPr txBox="1"/>
-          <p:nvPr/>
-        </p:nvSpPr>
-        <p:spPr>
-          <a:xfrm>
-            <a:off x="704088" y="8065008"/>
-            <a:ext cx="8915400" cy="228600"/>
-          </a:xfrm>
-          <a:prstGeom prst="rect">
-            <a:avLst/>
-          </a:prstGeom>
-          <a:noFill/>
-        </p:spPr>
-        <p:txBody>
-          <a:bodyPr wrap="none">
-            <a:spAutoFit/>
-          </a:bodyPr>
-          <a:lstStyle/>
-          <a:p>
-            <a:r>
-              <a:rPr sz="800">
-                <a:solidFill>
-                  <a:srgbClr val="000000"/>
-                </a:solidFill>
-              </a:rPr>
-              <a:t>Copyright © 2026 by Elephant Scale, All Rights Reserved</a:t>
-            </a:r>
-          </a:p>
-        </p:txBody>
-      </p:sp>
-    </p:spTree>
-  </p:cSld>
-  <p:clrMapOvr>
-    <a:masterClrMapping/>
-  </p:clrMapOvr>
-</p:sld>
-</file>
-
-<file path=ppt/slides/slide3.xml><?xml version="1.0" encoding="utf-8"?>
-<p:sld xmlns:a="http://schemas.openxmlformats.org/drawingml/2006/main" xmlns:p="http://schemas.openxmlformats.org/presentationml/2006/main" xmlns:r="http://schemas.openxmlformats.org/officeDocument/2006/relationships">
-  <p:cSld>
-    <p:spTree>
-      <p:nvGrpSpPr>
-        <p:cNvPr id="1" name=""/>
-        <p:cNvGrpSpPr/>
-        <p:nvPr/>
-      </p:nvGrpSpPr>
-      <p:grpSpPr/>
-      <p:sp>
-        <p:nvSpPr>
-          <p:cNvPr id="2" name="Title 1"/>
-          <p:cNvSpPr>
-            <a:spLocks noGrp="1"/>
-          </p:cNvSpPr>
-          <p:nvPr>
-            <p:ph type="title"/>
-          </p:nvPr>
-        </p:nvSpPr>
-        <p:spPr/>
-        <p:txBody>
-          <a:bodyPr/>
-          <a:lstStyle/>
-          <a:p>
-            <a:r>
-              <a:t>The Consumer's Job</a:t>
-            </a:r>
-          </a:p>
-        </p:txBody>
-      </p:sp>
-      <p:sp>
-        <p:nvSpPr>
-          <p:cNvPr id="3" name="Content Placeholder 2"/>
-          <p:cNvSpPr>
-            <a:spLocks noGrp="1"/>
-          </p:cNvSpPr>
-          <p:nvPr>
-            <p:ph idx="1"/>
-          </p:nvPr>
-        </p:nvSpPr>
-        <p:spPr/>
-        <p:txBody>
-          <a:bodyPr/>
-          <a:lstStyle/>
-          <a:p>
-            <a:r>
-              <a:t> A consumer is a</a:t>
-            </a:r>
-            <a:r>
-              <a:rPr b="1"/>
-              <a:t> poll loop</a:t>
-            </a:r>
-            <a:r>
-              <a:t> . It asks the broker for records, processes them, and</a:t>
-            </a:r>
-            <a:r>
-              <a:t> records how far it got.</a:t>
-            </a:r>
-          </a:p>
-          <a:p/>
-          <a:p/>
-          <a:p/>
-          <a:p>
-            <a:r>
-              <a:t> The consumer</a:t>
-            </a:r>
-            <a:r>
-              <a:rPr b="1"/>
-              <a:t> pulls</a:t>
-            </a:r>
-            <a:r>
-              <a:t> — the broker never pushes. You control the pace.</a:t>
-            </a:r>
-          </a:p>
-          <a:p>
-            <a:r>
-              <a:t> Three things to get right:</a:t>
-            </a:r>
-            <a:r>
-              <a:rPr b="1"/>
-              <a:t> group membership</a:t>
-            </a:r>
-            <a:r>
-              <a:t> ,</a:t>
-            </a:r>
-            <a:r>
-              <a:rPr b="1"/>
-              <a:t> offset commits</a:t>
-            </a:r>
-            <a:r>
-              <a:t> , and</a:t>
-            </a:r>
-            <a:r>
-              <a:rPr b="1"/>
-              <a:t> positioning</a:t>
-            </a:r>
-          </a:p>
-          <a:p>
-            <a:r>
-              <a:t> Everything in this module hangs off that loop</a:t>
-            </a:r>
-          </a:p>
-        </p:txBody>
-      </p:sp>
-      <p:sp>
-        <p:nvSpPr>
-          <p:cNvPr id="4" name="TextBox 3"/>
-          <p:cNvSpPr txBox="1"/>
-          <p:nvPr/>
-        </p:nvSpPr>
-        <p:spPr>
-          <a:xfrm>
-            <a:off x="704088" y="8065008"/>
-            <a:ext cx="8915400" cy="228600"/>
-          </a:xfrm>
-          <a:prstGeom prst="rect">
-            <a:avLst/>
-          </a:prstGeom>
-          <a:noFill/>
-        </p:spPr>
-        <p:txBody>
-          <a:bodyPr wrap="none">
-            <a:spAutoFit/>
-          </a:bodyPr>
-          <a:lstStyle/>
-          <a:p>
-            <a:r>
-              <a:rPr sz="800">
-                <a:solidFill>
-                  <a:srgbClr val="000000"/>
-                </a:solidFill>
-              </a:rPr>
-              <a:t>Copyright © 2026 by Elephant Scale, All Rights Reserved</a:t>
-            </a:r>
-          </a:p>
-        </p:txBody>
-      </p:sp>
-      <p:pic>
-        <p:nvPicPr>
-          <p:cNvPr id="5" name="Picture 4" descr="1.png"/>
-          <p:cNvPicPr>
-            <a:picLocks noChangeAspect="1"/>
-          </p:cNvPicPr>
-          <p:nvPr/>
-        </p:nvPicPr>
-        <p:blipFill>
-          <a:blip r:embed="rId2"/>
-          <a:stretch>
-            <a:fillRect/>
-          </a:stretch>
-        </p:blipFill>
-        <p:spPr>
-          <a:xfrm>
-            <a:off x="0" y="1353312"/>
-            <a:ext cx="11684000" cy="2120900"/>
-          </a:xfrm>
-          <a:prstGeom prst="rect">
-            <a:avLst/>
-          </a:prstGeom>
-        </p:spPr>
-      </p:pic>
-    </p:spTree>
-  </p:cSld>
-  <p:clrMapOvr>
-    <a:masterClrMapping/>
-  </p:clrMapOvr>
-</p:sld>
-</file>
-
-<file path=ppt/slides/slide4.xml><?xml version="1.0" encoding="utf-8"?>
-<p:sld xmlns:a="http://schemas.openxmlformats.org/drawingml/2006/main" xmlns:p="http://schemas.openxmlformats.org/presentationml/2006/main" xmlns:r="http://schemas.openxmlformats.org/officeDocument/2006/relationships">
-  <p:cSld>
-    <p:spTree>
-      <p:nvGrpSpPr>
-        <p:cNvPr id="1" name=""/>
-        <p:cNvGrpSpPr/>
-        <p:nvPr/>
-      </p:nvGrpSpPr>
-      <p:grpSpPr/>
-      <p:sp>
-        <p:nvSpPr>
-          <p:cNvPr id="2" name="Title 1"/>
-          <p:cNvSpPr>
-            <a:spLocks noGrp="1"/>
-          </p:cNvSpPr>
-          <p:nvPr>
-            <p:ph type="title"/>
-          </p:nvPr>
-        </p:nvSpPr>
-        <p:spPr/>
-        <p:txBody>
-          <a:bodyPr/>
-          <a:lstStyle/>
-          <a:p>
-            <a:r>
-              <a:t>Consumer Groups, Recapped</a:t>
-            </a:r>
-          </a:p>
-        </p:txBody>
-      </p:sp>
-      <p:sp>
-        <p:nvSpPr>
-          <p:cNvPr id="3" name="Content Placeholder 2"/>
-          <p:cNvSpPr>
-            <a:spLocks noGrp="1"/>
-          </p:cNvSpPr>
-          <p:nvPr>
-            <p:ph idx="1"/>
-          </p:nvPr>
-        </p:nvSpPr>
-        <p:spPr/>
-        <p:txBody>
-          <a:bodyPr/>
-          <a:lstStyle/>
-          <a:p>
-            <a:r>
-              <a:t> From the intro: consumers sharing a</a:t>
-            </a:r>
-            <a:r>
-              <a:rPr>
-                <a:latin typeface="Courier New"/>
-              </a:rPr>
-              <a:t> group.id</a:t>
-            </a:r>
-            <a:r>
-              <a:t> form a</a:t>
-            </a:r>
-            <a:r>
-              <a:rPr b="1"/>
-              <a:t> group</a:t>
-            </a:r>
-            <a:r>
-              <a:t> , and Kafka assigns each</a:t>
-            </a:r>
-            <a:r>
-              <a:t> partition to</a:t>
-            </a:r>
-            <a:r>
-              <a:rPr b="1"/>
-              <a:t> exactly one</a:t>
-            </a:r>
-            <a:r>
-              <a:t> consumer in it.</a:t>
-            </a:r>
-          </a:p>
-          <a:p/>
-          <a:p/>
-          <a:p>
-            <a:r>
-              <a:t> Scales reads: more consumers → fewer partitions each → more throughput</a:t>
-            </a:r>
-          </a:p>
-          <a:p>
-            <a:r>
-              <a:t> Ceiling = partition count (extra consumers sit idle)</a:t>
-            </a:r>
-          </a:p>
-          <a:p>
-            <a:r>
-              <a:t> Every</a:t>
-            </a:r>
-            <a:r>
-              <a:rPr b="1"/>
-              <a:t> group</a:t>
-            </a:r>
-            <a:r>
-              <a:t> reads the whole topic independently (pub/sub)</a:t>
-            </a:r>
-          </a:p>
-          <a:p>
-            <a:r>
-              <a:t> Now the internals: how assignment changes, and how progress is remembered.</a:t>
-            </a:r>
-          </a:p>
-        </p:txBody>
-      </p:sp>
-      <p:sp>
-        <p:nvSpPr>
-          <p:cNvPr id="4" name="TextBox 3"/>
-          <p:cNvSpPr txBox="1"/>
-          <p:nvPr/>
-        </p:nvSpPr>
-        <p:spPr>
-          <a:xfrm>
-            <a:off x="704088" y="8065008"/>
-            <a:ext cx="8915400" cy="228600"/>
-          </a:xfrm>
-          <a:prstGeom prst="rect">
-            <a:avLst/>
-          </a:prstGeom>
-          <a:noFill/>
-        </p:spPr>
-        <p:txBody>
-          <a:bodyPr wrap="none">
-            <a:spAutoFit/>
-          </a:bodyPr>
-          <a:lstStyle/>
-          <a:p>
-            <a:r>
-              <a:rPr sz="800">
-                <a:solidFill>
-                  <a:srgbClr val="000000"/>
-                </a:solidFill>
-              </a:rPr>
-              <a:t>Copyright © 2026 by Elephant Scale, All Rights Reserved</a:t>
-            </a:r>
-          </a:p>
-        </p:txBody>
-      </p:sp>
-      <p:pic>
-        <p:nvPicPr>
-          <p:cNvPr id="5" name="Picture 4" descr="1.png"/>
-          <p:cNvPicPr>
-            <a:picLocks noChangeAspect="1"/>
-          </p:cNvPicPr>
-          <p:nvPr/>
-        </p:nvPicPr>
-        <p:blipFill>
-          <a:blip r:embed="rId2"/>
-          <a:stretch>
-            <a:fillRect/>
-          </a:stretch>
-        </p:blipFill>
-        <p:spPr>
-          <a:xfrm>
-            <a:off x="0" y="1353312"/>
-            <a:ext cx="8178800" cy="1320800"/>
-          </a:xfrm>
-          <a:prstGeom prst="rect">
-            <a:avLst/>
-          </a:prstGeom>
-        </p:spPr>
-      </p:pic>
-    </p:spTree>
-  </p:cSld>
-  <p:clrMapOvr>
-    <a:masterClrMapping/>
-  </p:clrMapOvr>
-</p:sld>
-</file>
-
-<file path=ppt/slides/slide5.xml><?xml version="1.0" encoding="utf-8"?>
-<p:sld xmlns:a="http://schemas.openxmlformats.org/drawingml/2006/main" xmlns:p="http://schemas.openxmlformats.org/presentationml/2006/main" xmlns:r="http://schemas.openxmlformats.org/officeDocument/2006/relationships">
-  <p:cSld>
-    <p:spTree>
-      <p:nvGrpSpPr>
-        <p:cNvPr id="1" name=""/>
-        <p:cNvGrpSpPr/>
-        <p:nvPr/>
-      </p:nvGrpSpPr>
-      <p:grpSpPr/>
-      <p:sp>
-        <p:nvSpPr>
-          <p:cNvPr id="2" name="Title 1"/>
-          <p:cNvSpPr>
-            <a:spLocks noGrp="1"/>
-          </p:cNvSpPr>
-          <p:nvPr>
-            <p:ph type="title"/>
-          </p:nvPr>
-        </p:nvSpPr>
-        <p:spPr/>
-        <p:txBody>
-          <a:bodyPr/>
-          <a:lstStyle/>
-          <a:p>
-            <a:r>
-              <a:t>Rebalancing</a:t>
-            </a:r>
-          </a:p>
-        </p:txBody>
-      </p:sp>
-      <p:sp>
-        <p:nvSpPr>
-          <p:cNvPr id="3" name="Content Placeholder 2"/>
-          <p:cNvSpPr>
-            <a:spLocks noGrp="1"/>
-          </p:cNvSpPr>
-          <p:nvPr>
-            <p:ph idx="1"/>
-          </p:nvPr>
-        </p:nvSpPr>
-        <p:spPr/>
-        <p:txBody>
-          <a:bodyPr/>
-          <a:lstStyle/>
-          <a:p>
-            <a:r>
-              <a:t> When group membership changes, Kafka</a:t>
-            </a:r>
-            <a:r>
-              <a:rPr b="1"/>
-              <a:t> rebalances</a:t>
-            </a:r>
-            <a:r>
-              <a:t> — it recomputes which consumer owns</a:t>
-            </a:r>
-            <a:r>
-              <a:t> which partition.</a:t>
-            </a:r>
-          </a:p>
-          <a:p>
-            <a:r>
-              <a:t> Triggered when:</a:t>
-            </a:r>
-          </a:p>
-          <a:p>
-            <a:r>
-              <a:t> A consumer</a:t>
-            </a:r>
-            <a:r>
-              <a:rPr b="1"/>
-              <a:t> joins</a:t>
-            </a:r>
-            <a:r>
-              <a:t> (you scaled up)</a:t>
-            </a:r>
-          </a:p>
-          <a:p>
-            <a:r>
-              <a:t> A consumer</a:t>
-            </a:r>
-            <a:r>
-              <a:rPr b="1"/>
-              <a:t> leaves</a:t>
-            </a:r>
-            <a:r>
-              <a:t> or</a:t>
-            </a:r>
-            <a:r>
-              <a:rPr b="1"/>
-              <a:t> crashes</a:t>
-            </a:r>
-            <a:r>
-              <a:t> (misses heartbeats)</a:t>
-            </a:r>
-          </a:p>
-          <a:p>
-            <a:r>
-              <a:t> Partitions are</a:t>
-            </a:r>
-            <a:r>
-              <a:rPr b="1"/>
-              <a:t> added</a:t>
-            </a:r>
-            <a:r>
-              <a:t> to a subscribed topic</a:t>
-            </a:r>
-          </a:p>
-          <a:p/>
-          <a:p/>
-          <a:p>
-            <a:r>
-              <a:t> Rebalancing keeps the group working through failures — but it isn't free, as the next</a:t>
-            </a:r>
-            <a:r>
-              <a:t> slide shows.</a:t>
-            </a:r>
-          </a:p>
-        </p:txBody>
-      </p:sp>
-      <p:sp>
-        <p:nvSpPr>
-          <p:cNvPr id="4" name="TextBox 3"/>
-          <p:cNvSpPr txBox="1"/>
-          <p:nvPr/>
-        </p:nvSpPr>
-        <p:spPr>
-          <a:xfrm>
-            <a:off x="704088" y="8065008"/>
-            <a:ext cx="8915400" cy="228600"/>
-          </a:xfrm>
-          <a:prstGeom prst="rect">
-            <a:avLst/>
-          </a:prstGeom>
-          <a:noFill/>
-        </p:spPr>
-        <p:txBody>
-          <a:bodyPr wrap="none">
-            <a:spAutoFit/>
-          </a:bodyPr>
-          <a:lstStyle/>
-          <a:p>
-            <a:r>
-              <a:rPr sz="800">
-                <a:solidFill>
-                  <a:srgbClr val="000000"/>
-                </a:solidFill>
-              </a:rPr>
-              <a:t>Copyright © 2026 by Elephant Scale, All Rights Reserved</a:t>
-            </a:r>
-          </a:p>
-        </p:txBody>
-      </p:sp>
-      <p:pic>
-        <p:nvPicPr>
-          <p:cNvPr id="5" name="Picture 4" descr="1.png"/>
-          <p:cNvPicPr>
-            <a:picLocks noChangeAspect="1"/>
-          </p:cNvPicPr>
-          <p:nvPr/>
-        </p:nvPicPr>
-        <p:blipFill>
-          <a:blip r:embed="rId2"/>
-          <a:stretch>
-            <a:fillRect/>
-          </a:stretch>
-        </p:blipFill>
-        <p:spPr>
-          <a:xfrm>
-            <a:off x="0" y="3108960"/>
-            <a:ext cx="10160000" cy="1320800"/>
+            <a:off x="-12342" y="3846376"/>
+            <a:ext cx="9290812" cy="1207806"/>
           </a:xfrm>
           <a:prstGeom prst="rect">
             <a:avLst/>
@@ -4880,7 +5096,7 @@
 </file>
 
 <file path=ppt/slides/slide6.xml><?xml version="1.0" encoding="utf-8"?>
-<p:sld xmlns:a="http://schemas.openxmlformats.org/drawingml/2006/main" xmlns:p="http://schemas.openxmlformats.org/presentationml/2006/main" xmlns:r="http://schemas.openxmlformats.org/officeDocument/2006/relationships">
+<p:sld xmlns:a="http://schemas.openxmlformats.org/drawingml/2006/main" xmlns:r="http://schemas.openxmlformats.org/officeDocument/2006/relationships" xmlns:p="http://schemas.openxmlformats.org/presentationml/2006/main">
   <p:cSld>
     <p:spTree>
       <p:nvGrpSpPr>
@@ -4888,7 +5104,14 @@
         <p:cNvGrpSpPr/>
         <p:nvPr/>
       </p:nvGrpSpPr>
-      <p:grpSpPr/>
+      <p:grpSpPr>
+        <a:xfrm>
+          <a:off x="0" y="0"/>
+          <a:ext cx="0" cy="0"/>
+          <a:chOff x="0" y="0"/>
+          <a:chExt cx="0" cy="0"/>
+        </a:xfrm>
+      </p:grpSpPr>
       <p:sp>
         <p:nvSpPr>
           <p:cNvPr id="2" name="Title 1"/>
@@ -4933,10 +5156,7 @@
               <a:t> stop-the-world</a:t>
             </a:r>
             <a:r>
-              <a:t> : every consumer stops, gives</a:t>
-            </a:r>
-            <a:r>
-              <a:t> up its partitions, waits for the new assignment, then resumes.</a:t>
+              <a:t> : every consumer stops, gives up its partitions, waits for the new assignment, then resumes.</a:t>
             </a:r>
           </a:p>
           <a:p>
@@ -4964,10 +5184,7 @@
               <a:t> max.poll.interval.ms</a:t>
             </a:r>
             <a:r>
-              <a:t> , so the broker</a:t>
-            </a:r>
-            <a:r>
-              <a:t> thinks the consumer is dead and rebalances it out</a:t>
+              <a:t> , so the broker thinks the consumer is dead and rebalances it out</a:t>
             </a:r>
           </a:p>
         </p:txBody>
@@ -5014,7 +5231,7 @@
 </file>
 
 <file path=ppt/slides/slide7.xml><?xml version="1.0" encoding="utf-8"?>
-<p:sld xmlns:a="http://schemas.openxmlformats.org/drawingml/2006/main" xmlns:p="http://schemas.openxmlformats.org/presentationml/2006/main" xmlns:r="http://schemas.openxmlformats.org/officeDocument/2006/relationships">
+<p:sld xmlns:a="http://schemas.openxmlformats.org/drawingml/2006/main" xmlns:r="http://schemas.openxmlformats.org/officeDocument/2006/relationships" xmlns:p="http://schemas.openxmlformats.org/presentationml/2006/main">
   <p:cSld>
     <p:spTree>
       <p:nvGrpSpPr>
@@ -5022,7 +5239,14 @@
         <p:cNvGrpSpPr/>
         <p:nvPr/>
       </p:nvGrpSpPr>
-      <p:grpSpPr/>
+      <p:grpSpPr>
+        <a:xfrm>
+          <a:off x="0" y="0"/>
+          <a:ext cx="0" cy="0"/>
+          <a:chOff x="0" y="0"/>
+          <a:chExt cx="0" cy="0"/>
+        </a:xfrm>
+      </p:grpSpPr>
       <p:sp>
         <p:nvSpPr>
           <p:cNvPr id="2" name="Title 1"/>
@@ -5086,10 +5310,7 @@
               <a:t> broker coordinator</a:t>
             </a:r>
             <a:r>
-              <a:t> computes assignments; consumers no longer all sync through a</a:t>
-            </a:r>
-            <a:r>
-              <a:t> leader in lockstep</a:t>
+              <a:t> computes assignments; consumers no longer all sync through a leader in lockstep</a:t>
             </a:r>
           </a:p>
           <a:p>
@@ -5101,10 +5322,7 @@
               <a:t> incremental</a:t>
             </a:r>
             <a:r>
-              <a:t> — only the partitions that must move are revoked, the rest</a:t>
-            </a:r>
-            <a:r>
-              <a:t> keep flowing</a:t>
+              <a:t> — only the partitions that must move are revoked, the rest keep flowing</a:t>
             </a:r>
           </a:p>
           <a:p>
@@ -5121,17 +5339,16 @@
               <a:t> The default is still the classic protocol:</a:t>
             </a:r>
           </a:p>
-          <a:p/>
+          <a:p>
+            <a:endParaRPr/>
+          </a:p>
           <a:p>
             <a:r>
               <a:rPr b="1"/>
               <a:t> For you as a developer:</a:t>
             </a:r>
             <a:r>
-              <a:t> your poll loop, your commits, your rebalance listener — all</a:t>
-            </a:r>
-            <a:r>
-              <a:t> unchanged. You flip one config and the group coordinates differently underneath.</a:t>
+              <a:t> your poll loop, your commits, your rebalance listener — all unchanged. You flip one config and the group coordinates differently underneath.</a:t>
             </a:r>
           </a:p>
         </p:txBody>
@@ -5178,7 +5395,7 @@
           <p:nvPr/>
         </p:nvPicPr>
         <p:blipFill>
-          <a:blip r:embed="rId2"/>
+          <a:blip r:embed="rId3"/>
           <a:stretch>
             <a:fillRect/>
           </a:stretch>
@@ -5202,7 +5419,7 @@
 </file>
 
 <file path=ppt/slides/slide8.xml><?xml version="1.0" encoding="utf-8"?>
-<p:sld xmlns:a="http://schemas.openxmlformats.org/drawingml/2006/main" xmlns:p="http://schemas.openxmlformats.org/presentationml/2006/main" xmlns:r="http://schemas.openxmlformats.org/officeDocument/2006/relationships">
+<p:sld xmlns:a="http://schemas.openxmlformats.org/drawingml/2006/main" xmlns:r="http://schemas.openxmlformats.org/officeDocument/2006/relationships" xmlns:p="http://schemas.openxmlformats.org/presentationml/2006/main">
   <p:cSld>
     <p:spTree>
       <p:nvGrpSpPr>
@@ -5210,7 +5427,14 @@
         <p:cNvGrpSpPr/>
         <p:nvPr/>
       </p:nvGrpSpPr>
-      <p:grpSpPr/>
+      <p:grpSpPr>
+        <a:xfrm>
+          <a:off x="0" y="0"/>
+          <a:ext cx="0" cy="0"/>
+          <a:chOff x="0" y="0"/>
+          <a:chExt cx="0" cy="0"/>
+        </a:xfrm>
+      </p:grpSpPr>
       <p:sp>
         <p:nvSpPr>
           <p:cNvPr id="2" name="Title 1"/>
@@ -5255,10 +5479,7 @@
               <a:t> offset commit</a:t>
             </a:r>
             <a:r>
-              <a:t> records "this group has processed up to here" for a partition. That's</a:t>
-            </a:r>
-            <a:r>
-              <a:t> how a restarted or rebalanced consumer knows where to resume.</a:t>
+              <a:t> records "this group has processed up to here" for a partition. That's how a restarted or rebalanced consumer knows where to resume.</a:t>
             </a:r>
           </a:p>
           <a:p>
@@ -5297,7 +5518,9 @@
               <a:t> resumes from the last committed offset</a:t>
             </a:r>
           </a:p>
-          <a:p/>
+          <a:p>
+            <a:endParaRPr b="1"/>
+          </a:p>
           <a:p>
             <a:r>
               <a:t> The critical question:</a:t>
@@ -5307,10 +5530,7 @@
               <a:t> when</a:t>
             </a:r>
             <a:r>
-              <a:t> do you commit? That choice determines your delivery</a:t>
-            </a:r>
-            <a:r>
-              <a:t> semantics.</a:t>
+              <a:t> do you commit? That choice determines your delivery semantics.</a:t>
             </a:r>
           </a:p>
         </p:txBody>
@@ -5381,7 +5601,7 @@
 </file>
 
 <file path=ppt/slides/slide9.xml><?xml version="1.0" encoding="utf-8"?>
-<p:sld xmlns:a="http://schemas.openxmlformats.org/drawingml/2006/main" xmlns:p="http://schemas.openxmlformats.org/presentationml/2006/main" xmlns:r="http://schemas.openxmlformats.org/officeDocument/2006/relationships">
+<p:sld xmlns:a="http://schemas.openxmlformats.org/drawingml/2006/main" xmlns:r="http://schemas.openxmlformats.org/officeDocument/2006/relationships" xmlns:p="http://schemas.openxmlformats.org/presentationml/2006/main">
   <p:cSld>
     <p:spTree>
       <p:nvGrpSpPr>
@@ -5389,7 +5609,14 @@
         <p:cNvGrpSpPr/>
         <p:nvPr/>
       </p:nvGrpSpPr>
-      <p:grpSpPr/>
+      <p:grpSpPr>
+        <a:xfrm>
+          <a:off x="0" y="0"/>
+          <a:ext cx="0" cy="0"/>
+          <a:chOff x="0" y="0"/>
+          <a:chExt cx="0" cy="0"/>
+        </a:xfrm>
+      </p:grpSpPr>
       <p:sp>
         <p:nvSpPr>
           <p:cNvPr id="2" name="Title 1"/>
@@ -5437,9 +5664,15 @@
               <a:t> on a timer.</a:t>
             </a:r>
           </a:p>
-          <a:p/>
-          <a:p/>
-          <a:p/>
+          <a:p>
+            <a:endParaRPr/>
+          </a:p>
+          <a:p>
+            <a:endParaRPr/>
+          </a:p>
+          <a:p>
+            <a:endParaRPr/>
+          </a:p>
           <a:p>
             <a:r>
               <a:rPr b="1"/>
@@ -5470,10 +5703,7 @@
               <a:t> polled but hadn't finished</a:t>
             </a:r>
             <a:r>
-              <a:t> when you crashed</a:t>
-            </a:r>
-            <a:r>
-              <a:t> → those records are</a:t>
+              <a:t> when you crashed → those records are</a:t>
             </a:r>
             <a:r>
               <a:rPr b="1"/>
